--- a/slides/pptx/week03.pptx
+++ b/slides/pptx/week03.pptx
@@ -22,9 +22,12 @@
     <p:sldId id="270" r:id="rId16"/>
     <p:sldId id="271" r:id="rId17"/>
     <p:sldId id="272" r:id="rId18"/>
+    <p:sldId id="273" r:id="rId19"/>
+    <p:sldId id="274" r:id="rId20"/>
+    <p:sldId id="275" r:id="rId21"/>
   </p:sldIdLst>
   <p:notesMasterIdLst>
-    <p:notesMasterId r:id="rId19"/>
+    <p:notesMasterId r:id="rId22"/>
   </p:notesMasterIdLst>
   <p:sldSz cx="9144000" cy="5143500"/>
   <p:notesSz cx="5143500" cy="9144000"/>
@@ -606,7 +609,7 @@
           <a:p>
             <a:r>
               <a:rPr lang="en-US" dirty="0"/>
-              <a:t>The "right answers" slide — students should leave able to pick the correct primitive. Emphasize: use vetted libraries, don't invent. ~3 min.</a:t>
+              <a:t>The checklist of what to look for / avoid. Each maps to a CWE they'll cite. Note: "no integrity" = attacker can flip ciphertext bits undetected → that's why AEAD (GCM) matters. ~4 min.</a:t>
             </a:r>
             <a:endParaRPr lang="en-US" dirty="0"/>
           </a:p>
@@ -694,7 +697,7 @@
           <a:p>
             <a:r>
               <a:rPr lang="en-US" dirty="0"/>
-              <a:t>Quick reference; they map lab findings to these. ~1 min.</a:t>
+              <a:t>The "right answers" slide — students should leave able to pick the correct primitive. Emphasize: use vetted libraries, don't invent. ~3 min.</a:t>
             </a:r>
             <a:endParaRPr lang="en-US" dirty="0"/>
           </a:p>
@@ -782,7 +785,7 @@
           <a:p>
             <a:r>
               <a:rPr lang="en-US" dirty="0"/>
-              <a:t>Synthesis slide — the four separate concepts from the last several slides (KDF, cipher mode, RNG, key source) are one decision each in vulnerable_crypto.py, not one big "use better crypto" fix. Land on the closing line: picking AES-GCM doesn't save you if the key is still hardcoded. ~4 min.</a:t>
+              <a:t>Quick reference; they map lab findings to these. ~1 min.</a:t>
             </a:r>
             <a:endParaRPr lang="en-US" dirty="0"/>
           </a:p>
@@ -870,7 +873,7 @@
           <a:p>
             <a:r>
               <a:rPr lang="en-US" dirty="0"/>
-              <a:t>Explain rounds before lab. Round 1 = instant-feedback fun. Round 3 is NOT just "run the pre-fixed code and verify" — be precise that the rehash-on-login migration and the GCM decrypt/tamper-check are the parts students actually write; the rest of the fixed script is handed to them already implemented. Leaderboard on round 1. ~3 min.</a:t>
+              <a:t>The mechanism slide, parallel to Wk4 parameterize / Wk5 encode. Walk the four rows: md5 is fast + unsalted so a GPU cracks it -&gt; argon2id is slow + salted; ECB leaks -&gt; GCM adds nonce (unique) + tag (integrity); a hardcoded key means one leak breaks everything -&gt; load it from the environment/KMS; random is predictable -&gt; secrets is a CSPRNG. Punch line: crypto isn't one switch, it's four decisions, and a strong primitive with a weak decision is still broken. ~5 min.</a:t>
             </a:r>
             <a:endParaRPr lang="en-US" dirty="0"/>
           </a:p>
@@ -958,7 +961,7 @@
           <a:p>
             <a:r>
               <a:rPr lang="en-US" dirty="0"/>
-              <a:t>Graded output — six pieces, not three; don't let the deliverable slide undersell TLS (Task 8) or the evidence stamp (highest-impact single miss if skipped — output is byte-identical across the cohort without it). Point to vulnerable_crypto.py + solution_skeleton.py.</a:t>
+              <a:t>The mechanism slide, parallel to Wk4 parameterize / Wk5 encode. Walk the four rows: md5 is fast + unsalted so a GPU cracks it -&gt; argon2id is slow + salted; ECB leaks -&gt; GCM adds nonce (unique) + tag (integrity); a hardcoded key means one leak breaks everything -&gt; load it from the environment/KMS; random is predictable -&gt; secrets is a CSPRNG. Punch line: crypto isn't one switch, it's four decisions, and a strong primitive with a weak decision is still broken. ~5 min.</a:t>
             </a:r>
             <a:endParaRPr lang="en-US" dirty="0"/>
           </a:p>
@@ -1046,7 +1049,7 @@
           <a:p>
             <a:r>
               <a:rPr lang="en-US" dirty="0"/>
-              <a:t>Graded output — six pieces, not three; don't let the deliverable slide undersell TLS (Task 8) or the evidence stamp (highest-impact single miss if skipped — output is byte-identical across the cohort without it). Point to vulnerable_crypto.py + solution_skeleton.py.</a:t>
+              <a:t>Synthesis slide — the four separate concepts from the last several slides (KDF, cipher mode, RNG, key source) are one decision each in vulnerable_crypto.py, not one big "use better crypto" fix. Land on the closing line: picking AES-GCM doesn't save you if the key is still hardcoded. ~4 min.</a:t>
             </a:r>
             <a:endParaRPr lang="en-US" dirty="0"/>
           </a:p>
@@ -1134,7 +1137,7 @@
           <a:p>
             <a:r>
               <a:rPr lang="en-US" dirty="0"/>
-              <a:t>Recap. Cold-call: "how should we store passwords, and why salted+slow?" ~2 min.</a:t>
+              <a:t>Explain rounds before lab. Round 1 = instant-feedback fun. Round 3 is NOT just "run the pre-fixed code and verify" — be precise that the rehash-on-login migration and the GCM decrypt/tamper-check are the parts students actually write; the rest of the fixed script is handed to them already implemented. Leaderboard on round 1. ~3 min.</a:t>
             </a:r>
             <a:endParaRPr lang="en-US" dirty="0"/>
           </a:p>
@@ -1222,7 +1225,7 @@
           <a:p>
             <a:r>
               <a:rPr lang="en-US" dirty="0"/>
-              <a:t>Cliffhanger: "Next week — type one quote mark and log in as admin." Remind: hashcat + wordlist ready.</a:t>
+              <a:t>Graded output — six pieces, not three; don't let the deliverable slide undersell TLS (Task 8) or the evidence stamp (highest-impact single miss if skipped — output is byte-identical across the cohort without it). Point to vulnerable_crypto.py + solution_skeleton.py.</a:t>
             </a:r>
             <a:endParaRPr lang="en-US" dirty="0"/>
           </a:p>
@@ -1246,6 +1249,182 @@
             <a:fld id="{F7021451-1387-4CA6-816F-3879F97B5CBC}" type="slidenum">
               <a:rPr lang="en-US"/>
               <a:t>17</a:t>
+            </a:fld>
+            <a:endParaRPr lang="en-US"/>
+          </a:p>
+        </p:txBody>
+      </p:sp>
+    </p:spTree>
+    <p:extLst>
+      <p:ext uri="{BB962C8B-B14F-4D97-AF65-F5344CB8AC3E}">
+        <p14:creationId xmlns:p14="http://schemas.microsoft.com/office/powerpoint/2010/main" val="1024086991"/>
+      </p:ext>
+    </p:extLst>
+  </p:cSld>
+  <p:clrMapOvr>
+    <a:masterClrMapping/>
+  </p:clrMapOvr>
+</p:notes>
+</file>
+
+<file path=ppt/notesSlides/notesSlide18.xml><?xml version="1.0" encoding="utf-8"?>
+<p:notes xmlns:a="http://schemas.openxmlformats.org/drawingml/2006/main" xmlns:r="http://schemas.openxmlformats.org/officeDocument/2006/relationships" xmlns:p="http://schemas.openxmlformats.org/presentationml/2006/main">
+  <p:cSld>
+    <p:spTree>
+      <p:nvGrpSpPr>
+        <p:cNvPr id="1" name=""/>
+        <p:cNvGrpSpPr/>
+        <p:nvPr/>
+      </p:nvGrpSpPr>
+      <p:grpSpPr>
+        <a:xfrm>
+          <a:off x="0" y="0"/>
+          <a:ext cx="0" cy="0"/>
+          <a:chOff x="0" y="0"/>
+          <a:chExt cx="0" cy="0"/>
+        </a:xfrm>
+      </p:grpSpPr>
+      <p:sp>
+        <p:nvSpPr>
+          <p:cNvPr id="2" name="Slide Image Placeholder 1"/>
+          <p:cNvSpPr>
+            <a:spLocks noGrp="1" noRot="1" noChangeAspect="1"/>
+          </p:cNvSpPr>
+          <p:nvPr>
+            <p:ph type="sldImg"/>
+          </p:nvPr>
+        </p:nvSpPr>
+        <p:spPr/>
+      </p:sp>
+      <p:sp>
+        <p:nvSpPr>
+          <p:cNvPr id="3" name="Notes Placeholder 2"/>
+          <p:cNvSpPr>
+            <a:spLocks noGrp="1"/>
+          </p:cNvSpPr>
+          <p:nvPr>
+            <p:ph type="body" idx="1"/>
+          </p:nvPr>
+        </p:nvSpPr>
+        <p:spPr/>
+        <p:txBody>
+          <a:bodyPr/>
+          <a:lstStyle/>
+          <a:p>
+            <a:r>
+              <a:rPr lang="en-US" dirty="0"/>
+              <a:t>Graded output — six pieces, not three; don't let the deliverable slide undersell TLS (Task 8) or the evidence stamp (highest-impact single miss if skipped — output is byte-identical across the cohort without it). Point to vulnerable_crypto.py + solution_skeleton.py.</a:t>
+            </a:r>
+            <a:endParaRPr lang="en-US" dirty="0"/>
+          </a:p>
+        </p:txBody>
+      </p:sp>
+      <p:sp>
+        <p:nvSpPr>
+          <p:cNvPr id="4" name="Slide Number Placeholder 3"/>
+          <p:cNvSpPr>
+            <a:spLocks noGrp="1"/>
+          </p:cNvSpPr>
+          <p:nvPr>
+            <p:ph type="sldNum" sz="quarter" idx="10"/>
+          </p:nvPr>
+        </p:nvSpPr>
+        <p:spPr/>
+        <p:txBody>
+          <a:bodyPr/>
+          <a:lstStyle/>
+          <a:p>
+            <a:fld id="{F7021451-1387-4CA6-816F-3879F97B5CBC}" type="slidenum">
+              <a:rPr lang="en-US"/>
+              <a:t>18</a:t>
+            </a:fld>
+            <a:endParaRPr lang="en-US"/>
+          </a:p>
+        </p:txBody>
+      </p:sp>
+    </p:spTree>
+    <p:extLst>
+      <p:ext uri="{BB962C8B-B14F-4D97-AF65-F5344CB8AC3E}">
+        <p14:creationId xmlns:p14="http://schemas.microsoft.com/office/powerpoint/2010/main" val="1024086991"/>
+      </p:ext>
+    </p:extLst>
+  </p:cSld>
+  <p:clrMapOvr>
+    <a:masterClrMapping/>
+  </p:clrMapOvr>
+</p:notes>
+</file>
+
+<file path=ppt/notesSlides/notesSlide19.xml><?xml version="1.0" encoding="utf-8"?>
+<p:notes xmlns:a="http://schemas.openxmlformats.org/drawingml/2006/main" xmlns:r="http://schemas.openxmlformats.org/officeDocument/2006/relationships" xmlns:p="http://schemas.openxmlformats.org/presentationml/2006/main">
+  <p:cSld>
+    <p:spTree>
+      <p:nvGrpSpPr>
+        <p:cNvPr id="1" name=""/>
+        <p:cNvGrpSpPr/>
+        <p:nvPr/>
+      </p:nvGrpSpPr>
+      <p:grpSpPr>
+        <a:xfrm>
+          <a:off x="0" y="0"/>
+          <a:ext cx="0" cy="0"/>
+          <a:chOff x="0" y="0"/>
+          <a:chExt cx="0" cy="0"/>
+        </a:xfrm>
+      </p:grpSpPr>
+      <p:sp>
+        <p:nvSpPr>
+          <p:cNvPr id="2" name="Slide Image Placeholder 1"/>
+          <p:cNvSpPr>
+            <a:spLocks noGrp="1" noRot="1" noChangeAspect="1"/>
+          </p:cNvSpPr>
+          <p:nvPr>
+            <p:ph type="sldImg"/>
+          </p:nvPr>
+        </p:nvSpPr>
+        <p:spPr/>
+      </p:sp>
+      <p:sp>
+        <p:nvSpPr>
+          <p:cNvPr id="3" name="Notes Placeholder 2"/>
+          <p:cNvSpPr>
+            <a:spLocks noGrp="1"/>
+          </p:cNvSpPr>
+          <p:nvPr>
+            <p:ph type="body" idx="1"/>
+          </p:nvPr>
+        </p:nvSpPr>
+        <p:spPr/>
+        <p:txBody>
+          <a:bodyPr/>
+          <a:lstStyle/>
+          <a:p>
+            <a:r>
+              <a:rPr lang="en-US" dirty="0"/>
+              <a:t>Recap. Cold-call: "how should we store passwords, and why salted+slow?" ~2 min.</a:t>
+            </a:r>
+            <a:endParaRPr lang="en-US" dirty="0"/>
+          </a:p>
+        </p:txBody>
+      </p:sp>
+      <p:sp>
+        <p:nvSpPr>
+          <p:cNvPr id="4" name="Slide Number Placeholder 3"/>
+          <p:cNvSpPr>
+            <a:spLocks noGrp="1"/>
+          </p:cNvSpPr>
+          <p:nvPr>
+            <p:ph type="sldNum" sz="quarter" idx="10"/>
+          </p:nvPr>
+        </p:nvSpPr>
+        <p:spPr/>
+        <p:txBody>
+          <a:bodyPr/>
+          <a:lstStyle/>
+          <a:p>
+            <a:fld id="{F7021451-1387-4CA6-816F-3879F97B5CBC}" type="slidenum">
+              <a:rPr lang="en-US"/>
+              <a:t>19</a:t>
             </a:fld>
             <a:endParaRPr lang="en-US"/>
           </a:p>
@@ -1352,6 +1531,94 @@
 </p:notes>
 </file>
 
+<file path=ppt/notesSlides/notesSlide20.xml><?xml version="1.0" encoding="utf-8"?>
+<p:notes xmlns:a="http://schemas.openxmlformats.org/drawingml/2006/main" xmlns:r="http://schemas.openxmlformats.org/officeDocument/2006/relationships" xmlns:p="http://schemas.openxmlformats.org/presentationml/2006/main">
+  <p:cSld>
+    <p:spTree>
+      <p:nvGrpSpPr>
+        <p:cNvPr id="1" name=""/>
+        <p:cNvGrpSpPr/>
+        <p:nvPr/>
+      </p:nvGrpSpPr>
+      <p:grpSpPr>
+        <a:xfrm>
+          <a:off x="0" y="0"/>
+          <a:ext cx="0" cy="0"/>
+          <a:chOff x="0" y="0"/>
+          <a:chExt cx="0" cy="0"/>
+        </a:xfrm>
+      </p:grpSpPr>
+      <p:sp>
+        <p:nvSpPr>
+          <p:cNvPr id="2" name="Slide Image Placeholder 1"/>
+          <p:cNvSpPr>
+            <a:spLocks noGrp="1" noRot="1" noChangeAspect="1"/>
+          </p:cNvSpPr>
+          <p:nvPr>
+            <p:ph type="sldImg"/>
+          </p:nvPr>
+        </p:nvSpPr>
+        <p:spPr/>
+      </p:sp>
+      <p:sp>
+        <p:nvSpPr>
+          <p:cNvPr id="3" name="Notes Placeholder 2"/>
+          <p:cNvSpPr>
+            <a:spLocks noGrp="1"/>
+          </p:cNvSpPr>
+          <p:nvPr>
+            <p:ph type="body" idx="1"/>
+          </p:nvPr>
+        </p:nvSpPr>
+        <p:spPr/>
+        <p:txBody>
+          <a:bodyPr/>
+          <a:lstStyle/>
+          <a:p>
+            <a:r>
+              <a:rPr lang="en-US" dirty="0"/>
+              <a:t>Cliffhanger: "Next week — type one quote mark and log in as admin." Remind: hashcat + wordlist ready.</a:t>
+            </a:r>
+            <a:endParaRPr lang="en-US" dirty="0"/>
+          </a:p>
+        </p:txBody>
+      </p:sp>
+      <p:sp>
+        <p:nvSpPr>
+          <p:cNvPr id="4" name="Slide Number Placeholder 3"/>
+          <p:cNvSpPr>
+            <a:spLocks noGrp="1"/>
+          </p:cNvSpPr>
+          <p:nvPr>
+            <p:ph type="sldNum" sz="quarter" idx="10"/>
+          </p:nvPr>
+        </p:nvSpPr>
+        <p:spPr/>
+        <p:txBody>
+          <a:bodyPr/>
+          <a:lstStyle/>
+          <a:p>
+            <a:fld id="{F7021451-1387-4CA6-816F-3879F97B5CBC}" type="slidenum">
+              <a:rPr lang="en-US"/>
+              <a:t>20</a:t>
+            </a:fld>
+            <a:endParaRPr lang="en-US"/>
+          </a:p>
+        </p:txBody>
+      </p:sp>
+    </p:spTree>
+    <p:extLst>
+      <p:ext uri="{BB962C8B-B14F-4D97-AF65-F5344CB8AC3E}">
+        <p14:creationId xmlns:p14="http://schemas.microsoft.com/office/powerpoint/2010/main" val="1024086991"/>
+      </p:ext>
+    </p:extLst>
+  </p:cSld>
+  <p:clrMapOvr>
+    <a:masterClrMapping/>
+  </p:clrMapOvr>
+</p:notes>
+</file>
+
 <file path=ppt/notesSlides/notesSlide3.xml><?xml version="1.0" encoding="utf-8"?>
 <p:notes xmlns:a="http://schemas.openxmlformats.org/drawingml/2006/main" xmlns:r="http://schemas.openxmlformats.org/officeDocument/2006/relationships" xmlns:p="http://schemas.openxmlformats.org/presentationml/2006/main">
   <p:cSld>
@@ -1838,7 +2105,7 @@
           <a:p>
             <a:r>
               <a:rPr lang="en-US" dirty="0"/>
-              <a:t>Walk the attack: the attacker doesn't "reverse" the hash — they hash guesses and compare. Fast+unsalted = cheap; salted+slow = expensive. This is the lab's round 1. ~5 min.</a:t>
+              <a:t>Leave this up during Capture the Hash. The static companion to the aes-modes sim: identical plaintext -&gt; identical ciphertext (orange, '='), and GCM -&gt; different blocks (blue, '='-crossed). Point at the two equal orange blocks: 'that equality is the leak.' Land on the footer: AES is a primitive, not a decision — mode, nonce, key source and RNG are four separate choices. ~3 min.</a:t>
             </a:r>
             <a:endParaRPr lang="en-US" dirty="0"/>
           </a:p>
@@ -1926,7 +2193,7 @@
           <a:p>
             <a:r>
               <a:rPr lang="en-US" dirty="0"/>
-              <a:t>The checklist of what to look for / avoid. Each maps to a CWE they'll cite. Note: "no integrity" = attacker can flip ciphertext bits undetected → that's why AEAD (GCM) matters. ~4 min.</a:t>
+              <a:t>Walk the attack: the attacker doesn't "reverse" the hash — they hash guesses and compare. Fast+unsalted = cheap; salted+slow = expensive. This is the lab's round 1. ~5 min.</a:t>
             </a:r>
             <a:endParaRPr lang="en-US" dirty="0"/>
           </a:p>
@@ -2559,7 +2826,7 @@
                 <a:ea typeface="Arial" pitchFamily="34" charset="-122"/>
                 <a:cs typeface="Arial" pitchFamily="34" charset="-120"/>
               </a:rPr>
-              <a:t>Do this instead</a:t>
+              <a:t>Common crypto failures (A04:2025)</a:t>
             </a:r>
             <a:endParaRPr lang="en-US" sz="2600" dirty="0"/>
           </a:p>
@@ -2633,7 +2900,7 @@
                 <a:ea typeface="Calibri" pitchFamily="34" charset="-122"/>
                 <a:cs typeface="Calibri" pitchFamily="34" charset="-120"/>
               </a:rPr>
-              <a:t>Authenticated encryption: AES-GCM or ChaCha20-Poly1305</a:t>
+              <a:t>ECB mode → block patterns leak</a:t>
             </a:r>
             <a:endParaRPr lang="en-US" sz="1400" dirty="0"/>
           </a:p>
@@ -2654,7 +2921,7 @@
                 <a:ea typeface="Calibri" pitchFamily="34" charset="-122"/>
                 <a:cs typeface="Calibri" pitchFamily="34" charset="-120"/>
               </a:rPr>
-              <a:t>Keys from a secrets manager / KMS — never in code</a:t>
+              <a:t>Hardcoded keys / keys in source (CWE-321, a case of CWE-798)</a:t>
             </a:r>
             <a:endParaRPr lang="en-US" sz="1400" dirty="0"/>
           </a:p>
@@ -2675,7 +2942,7 @@
                 <a:ea typeface="Calibri" pitchFamily="34" charset="-122"/>
                 <a:cs typeface="Calibri" pitchFamily="34" charset="-120"/>
               </a:rPr>
-              <a:t>CSPRNG: secrets (Python), crypto.randomBytes (Node)</a:t>
+              <a:t>Weak RNG (random instead of secrets/CSPRNG) (CWE-330)</a:t>
             </a:r>
             <a:endParaRPr lang="en-US" sz="1400" dirty="0"/>
           </a:p>
@@ -2696,7 +2963,7 @@
                 <a:ea typeface="Calibri" pitchFamily="34" charset="-122"/>
                 <a:cs typeface="Calibri" pitchFamily="34" charset="-120"/>
               </a:rPr>
-              <a:t>SHA-256+ for integrity; argon2id/bcrypt for passwords</a:t>
+              <a:t>MD5 / SHA-1 for security; unauthenticated encryption (no integrity)</a:t>
             </a:r>
             <a:endParaRPr lang="en-US" sz="1400" dirty="0"/>
           </a:p>
@@ -2881,7 +3148,7 @@
                 <a:ea typeface="Arial" pitchFamily="34" charset="-122"/>
                 <a:cs typeface="Arial" pitchFamily="34" charset="-120"/>
               </a:rPr>
-              <a:t>CWE mapping</a:t>
+              <a:t>Do this instead</a:t>
             </a:r>
             <a:endParaRPr lang="en-US" sz="2600" dirty="0"/>
           </a:p>
@@ -2955,7 +3222,7 @@
                 <a:ea typeface="Calibri" pitchFamily="34" charset="-122"/>
                 <a:cs typeface="Calibri" pitchFamily="34" charset="-120"/>
               </a:rPr>
-              <a:t>CWE-327 — broken/risky crypto algorithm</a:t>
+              <a:t>Authenticated encryption: AES-GCM or ChaCha20-Poly1305</a:t>
             </a:r>
             <a:endParaRPr lang="en-US" sz="1400" dirty="0"/>
           </a:p>
@@ -2976,7 +3243,7 @@
                 <a:ea typeface="Calibri" pitchFamily="34" charset="-122"/>
                 <a:cs typeface="Calibri" pitchFamily="34" charset="-120"/>
               </a:rPr>
-              <a:t>CWE-916 — weak password hash (no/weak KDF)</a:t>
+              <a:t>Keys from a secrets manager / KMS — never in code</a:t>
             </a:r>
             <a:endParaRPr lang="en-US" sz="1400" dirty="0"/>
           </a:p>
@@ -2997,7 +3264,7 @@
                 <a:ea typeface="Calibri" pitchFamily="34" charset="-122"/>
                 <a:cs typeface="Calibri" pitchFamily="34" charset="-120"/>
               </a:rPr>
-              <a:t>CWE-330 — insufficiently random values</a:t>
+              <a:t>CSPRNG: secrets (Python), crypto.randomBytes (Node)</a:t>
             </a:r>
             <a:endParaRPr lang="en-US" sz="1400" dirty="0"/>
           </a:p>
@@ -3018,7 +3285,7 @@
                 <a:ea typeface="Calibri" pitchFamily="34" charset="-122"/>
                 <a:cs typeface="Calibri" pitchFamily="34" charset="-120"/>
               </a:rPr>
-              <a:t>CWE-798 — hardcoded key</a:t>
+              <a:t>SHA-256+ for integrity; argon2id/bcrypt for passwords</a:t>
             </a:r>
             <a:endParaRPr lang="en-US" sz="1400" dirty="0"/>
           </a:p>
@@ -3203,7 +3470,7 @@
                 <a:ea typeface="Arial" pitchFamily="34" charset="-122"/>
                 <a:cs typeface="Arial" pitchFamily="34" charset="-120"/>
               </a:rPr>
-              <a:t>Four decisions, four fixes</a:t>
+              <a:t>CWE mapping</a:t>
             </a:r>
             <a:endParaRPr lang="en-US" sz="2600" dirty="0"/>
           </a:p>
@@ -3211,14 +3478,43 @@
       </p:sp>
       <p:sp>
         <p:nvSpPr>
-          <p:cNvPr id="5" name="Text 2"/>
-          <p:cNvSpPr/>
-          <p:nvPr/>
-        </p:nvSpPr>
-        <p:spPr>
-          <a:xfrm>
-            <a:off x="548640" y="1325880"/>
-            <a:ext cx="8046720" cy="1645920"/>
+          <p:cNvPr id="5" name="Shape 2"/>
+          <p:cNvSpPr/>
+          <p:nvPr/>
+        </p:nvSpPr>
+        <p:spPr>
+          <a:xfrm>
+            <a:off x="457200" y="1325880"/>
+            <a:ext cx="8229600" cy="1517904"/>
+          </a:xfrm>
+          <a:prstGeom prst="roundRect">
+            <a:avLst>
+              <a:gd name="adj" fmla="val 4819"/>
+            </a:avLst>
+          </a:prstGeom>
+          <a:solidFill>
+            <a:srgbClr val="F1F5F9"/>
+          </a:solidFill>
+          <a:ln/>
+          <a:effectLst>
+            <a:outerShdw sx="100000" sy="100000" kx="0" ky="0" algn="bl" rotWithShape="0" blurRad="76200" dist="25400" dir="5400000">
+              <a:srgbClr val="000000">
+                <a:alpha val="12000"/>
+              </a:srgbClr>
+            </a:outerShdw>
+          </a:effectLst>
+        </p:spPr>
+      </p:sp>
+      <p:sp>
+        <p:nvSpPr>
+          <p:cNvPr id="6" name="Text 3"/>
+          <p:cNvSpPr/>
+          <p:nvPr/>
+        </p:nvSpPr>
+        <p:spPr>
+          <a:xfrm>
+            <a:off x="731520" y="1435608"/>
+            <a:ext cx="7680960" cy="1298448"/>
           </a:xfrm>
           <a:prstGeom prst="rect">
             <a:avLst/>
@@ -3232,8 +3528,12 @@
           </a:bodyPr>
           <a:lstStyle/>
           <a:p>
-            <a:pPr indent="0" marL="0">
-              <a:buNone/>
+            <a:pPr marL="342900" indent="-342900">
+              <a:spcAft>
+                <a:spcPts val="600"/>
+              </a:spcAft>
+              <a:buSzPct val="100000"/>
+              <a:buChar char="•"/>
             </a:pPr>
             <a:r>
               <a:rPr lang="en-US" sz="1400" dirty="0">
@@ -3244,45 +3544,108 @@
                 <a:ea typeface="Calibri" pitchFamily="34" charset="-122"/>
                 <a:cs typeface="Calibri" pitchFamily="34" charset="-120"/>
               </a:rPr>
-              <a:t>See diagram: Four crypto misuses and their fixes: password storage (md5 to argon2id), cipher mode (hardcoded-key ECB to GCM with a nonce and auth tag), randomness (random.choice to secrets.token_urlsafe), and key source (hardcoded key to an environment variable). One cipher name answers none of these four questions — AES-GCM under a hardcoded key is still CWE-798. (web only)</a:t>
+              <a:t>CWE-327 — broken/risky crypto algorithm</a:t>
             </a:r>
             <a:endParaRPr lang="en-US" sz="1400" dirty="0"/>
           </a:p>
-        </p:txBody>
-      </p:sp>
-      <p:sp>
-        <p:nvSpPr>
-          <p:cNvPr id="6" name="Text 3"/>
-          <p:cNvSpPr/>
-          <p:nvPr/>
-        </p:nvSpPr>
-        <p:spPr>
-          <a:xfrm>
-            <a:off x="457200" y="4800600"/>
-            <a:ext cx="6949440" cy="274320"/>
-          </a:xfrm>
-          <a:prstGeom prst="rect">
-            <a:avLst/>
-          </a:prstGeom>
-          <a:noFill/>
-          <a:ln/>
-        </p:spPr>
-        <p:txBody>
-          <a:bodyPr wrap="square" lIns="0" tIns="0" rIns="0" bIns="0" rtlCol="0" anchor="ctr"/>
-          <a:lstStyle/>
-          <a:p>
-            <a:pPr indent="0" marL="0">
-              <a:buNone/>
-            </a:pPr>
-            <a:r>
-              <a:rPr lang="en-US" sz="900" dirty="0">
-                <a:solidFill>
-                  <a:srgbClr val="64748B"/>
+          <a:p>
+            <a:pPr marL="342900" indent="-342900">
+              <a:spcAft>
+                <a:spcPts val="600"/>
+              </a:spcAft>
+              <a:buSzPct val="100000"/>
+              <a:buChar char="•"/>
+            </a:pPr>
+            <a:r>
+              <a:rPr lang="en-US" sz="1400" dirty="0">
+                <a:solidFill>
+                  <a:srgbClr val="1F2937"/>
                 </a:solidFill>
                 <a:latin typeface="Calibri" pitchFamily="34" charset="0"/>
                 <a:ea typeface="Calibri" pitchFamily="34" charset="-122"/>
                 <a:cs typeface="Calibri" pitchFamily="34" charset="-120"/>
               </a:rPr>
+              <a:t>CWE-916 — weak password hash (no/weak KDF)</a:t>
+            </a:r>
+            <a:endParaRPr lang="en-US" sz="1400" dirty="0"/>
+          </a:p>
+          <a:p>
+            <a:pPr marL="342900" indent="-342900">
+              <a:spcAft>
+                <a:spcPts val="600"/>
+              </a:spcAft>
+              <a:buSzPct val="100000"/>
+              <a:buChar char="•"/>
+            </a:pPr>
+            <a:r>
+              <a:rPr lang="en-US" sz="1400" dirty="0">
+                <a:solidFill>
+                  <a:srgbClr val="1F2937"/>
+                </a:solidFill>
+                <a:latin typeface="Calibri" pitchFamily="34" charset="0"/>
+                <a:ea typeface="Calibri" pitchFamily="34" charset="-122"/>
+                <a:cs typeface="Calibri" pitchFamily="34" charset="-120"/>
+              </a:rPr>
+              <a:t>CWE-330 — insufficiently random values</a:t>
+            </a:r>
+            <a:endParaRPr lang="en-US" sz="1400" dirty="0"/>
+          </a:p>
+          <a:p>
+            <a:pPr marL="342900" indent="-342900">
+              <a:spcAft>
+                <a:spcPts val="600"/>
+              </a:spcAft>
+              <a:buSzPct val="100000"/>
+              <a:buChar char="•"/>
+            </a:pPr>
+            <a:r>
+              <a:rPr lang="en-US" sz="1400" dirty="0">
+                <a:solidFill>
+                  <a:srgbClr val="1F2937"/>
+                </a:solidFill>
+                <a:latin typeface="Calibri" pitchFamily="34" charset="0"/>
+                <a:ea typeface="Calibri" pitchFamily="34" charset="-122"/>
+                <a:cs typeface="Calibri" pitchFamily="34" charset="-120"/>
+              </a:rPr>
+              <a:t>CWE-321 — hardcoded key (a case of CWE-798, which OWASP files under A07)</a:t>
+            </a:r>
+            <a:endParaRPr lang="en-US" sz="1400" dirty="0"/>
+          </a:p>
+        </p:txBody>
+      </p:sp>
+      <p:sp>
+        <p:nvSpPr>
+          <p:cNvPr id="7" name="Text 4"/>
+          <p:cNvSpPr/>
+          <p:nvPr/>
+        </p:nvSpPr>
+        <p:spPr>
+          <a:xfrm>
+            <a:off x="457200" y="4800600"/>
+            <a:ext cx="6949440" cy="274320"/>
+          </a:xfrm>
+          <a:prstGeom prst="rect">
+            <a:avLst/>
+          </a:prstGeom>
+          <a:noFill/>
+          <a:ln/>
+        </p:spPr>
+        <p:txBody>
+          <a:bodyPr wrap="square" lIns="0" tIns="0" rIns="0" bIns="0" rtlCol="0" anchor="ctr"/>
+          <a:lstStyle/>
+          <a:p>
+            <a:pPr indent="0" marL="0">
+              <a:buNone/>
+            </a:pPr>
+            <a:r>
+              <a:rPr lang="en-US" sz="900" dirty="0">
+                <a:solidFill>
+                  <a:srgbClr val="64748B"/>
+                </a:solidFill>
+                <a:latin typeface="Calibri" pitchFamily="34" charset="0"/>
+                <a:ea typeface="Calibri" pitchFamily="34" charset="-122"/>
+                <a:cs typeface="Calibri" pitchFamily="34" charset="-120"/>
+              </a:rPr>
               <a:t>Software Security · Week 3</a:t>
             </a:r>
             <a:endParaRPr lang="en-US" sz="900" dirty="0"/>
@@ -3291,7 +3654,7 @@
       </p:sp>
       <p:pic>
         <p:nvPicPr>
-          <p:cNvPr id="7" name="Image 1" descr="/Users/pop7/Library/CloudStorage/OneDrive-MonsterConnectCo.,Ltd/Lecture/KOSEN69 - software-security/slides/pptx/assets/logo-small.png">    </p:cNvPr>
+          <p:cNvPr id="8" name="Image 1" descr="/Users/pop7/Library/CloudStorage/OneDrive-MonsterConnectCo.,Ltd/Lecture/KOSEN69 - software-security/slides/pptx/assets/logo-small.png">    </p:cNvPr>
           <p:cNvPicPr>
             <a:picLocks noChangeAspect="1"/>
           </p:cNvPicPr>
@@ -3429,7 +3792,7 @@
                 <a:ea typeface="Arial" pitchFamily="34" charset="-122"/>
                 <a:cs typeface="Arial" pitchFamily="34" charset="-120"/>
               </a:rPr>
-              <a:t>🔓 Game — Capture the Hash</a:t>
+              <a:t>Four fixes — in the code</a:t>
             </a:r>
             <a:endParaRPr lang="en-US" sz="2600" dirty="0"/>
           </a:p>
@@ -3444,11 +3807,147 @@
         <p:spPr>
           <a:xfrm>
             <a:off x="457200" y="1325880"/>
-            <a:ext cx="8229600" cy="1810512"/>
+            <a:ext cx="8229600" cy="1371600"/>
           </a:xfrm>
           <a:prstGeom prst="roundRect">
             <a:avLst>
-              <a:gd name="adj" fmla="val 4040"/>
+              <a:gd name="adj" fmla="val 4000"/>
+            </a:avLst>
+          </a:prstGeom>
+          <a:solidFill>
+            <a:srgbClr val="0A1020"/>
+          </a:solidFill>
+          <a:ln w="12700">
+            <a:solidFill>
+              <a:srgbClr val="E8EDF3"/>
+            </a:solidFill>
+            <a:prstDash val="solid"/>
+          </a:ln>
+        </p:spPr>
+      </p:sp>
+      <p:sp>
+        <p:nvSpPr>
+          <p:cNvPr id="6" name="Text 3"/>
+          <p:cNvSpPr/>
+          <p:nvPr/>
+        </p:nvSpPr>
+        <p:spPr>
+          <a:xfrm>
+            <a:off x="640080" y="1399032"/>
+            <a:ext cx="7863840" cy="1225296"/>
+          </a:xfrm>
+          <a:prstGeom prst="rect">
+            <a:avLst/>
+          </a:prstGeom>
+          <a:noFill/>
+          <a:ln/>
+        </p:spPr>
+        <p:txBody>
+          <a:bodyPr wrap="square" lIns="0" tIns="0" rIns="0" bIns="0" rtlCol="0" anchor="t">
+            <a:normAutofit/>
+          </a:bodyPr>
+          <a:lstStyle/>
+          <a:p>
+            <a:pPr indent="0" marL="0">
+              <a:buNone/>
+            </a:pPr>
+            <a:r>
+              <a:rPr lang="en-US" sz="1150" dirty="0">
+                <a:solidFill>
+                  <a:srgbClr val="9FE7D6"/>
+                </a:solidFill>
+                <a:latin typeface="Courier New" pitchFamily="34" charset="0"/>
+                <a:ea typeface="Courier New" pitchFamily="34" charset="-122"/>
+                <a:cs typeface="Courier New" pitchFamily="34" charset="-120"/>
+              </a:rPr>
+              <a:t># vulnerable_crypto.py                       -&gt;  solution_skeleton.py</a:t>
+            </a:r>
+            <a:endParaRPr lang="en-US" sz="1150" dirty="0"/>
+          </a:p>
+          <a:p>
+            <a:pPr indent="0" marL="0">
+              <a:buNone/>
+            </a:pPr>
+            <a:r>
+              <a:rPr lang="en-US" sz="1150" dirty="0">
+                <a:solidFill>
+                  <a:srgbClr val="9FE7D6"/>
+                </a:solidFill>
+                <a:latin typeface="Courier New" pitchFamily="34" charset="0"/>
+                <a:ea typeface="Courier New" pitchFamily="34" charset="-122"/>
+                <a:cs typeface="Courier New" pitchFamily="34" charset="-120"/>
+              </a:rPr>
+              <a:t>md5(pw).hexdigest()           # CWE-916      -&gt;  argon2.PasswordHasher().hash(pw)</a:t>
+            </a:r>
+            <a:endParaRPr lang="en-US" sz="1150" dirty="0"/>
+          </a:p>
+          <a:p>
+            <a:pPr indent="0" marL="0">
+              <a:buNone/>
+            </a:pPr>
+            <a:r>
+              <a:rPr lang="en-US" sz="1150" dirty="0">
+                <a:solidFill>
+                  <a:srgbClr val="9FE7D6"/>
+                </a:solidFill>
+                <a:latin typeface="Courier New" pitchFamily="34" charset="0"/>
+                <a:ea typeface="Courier New" pitchFamily="34" charset="-122"/>
+                <a:cs typeface="Courier New" pitchFamily="34" charset="-120"/>
+              </a:rPr>
+              <a:t>AES.new(key, AES.MODE_ECB)    # CWE-327      -&gt;  AES.new(key, MODE_GCM, nonce=os.urandom(12))</a:t>
+            </a:r>
+            <a:endParaRPr lang="en-US" sz="1150" dirty="0"/>
+          </a:p>
+          <a:p>
+            <a:pPr indent="0" marL="0">
+              <a:buNone/>
+            </a:pPr>
+            <a:r>
+              <a:rPr lang="en-US" sz="1150" dirty="0">
+                <a:solidFill>
+                  <a:srgbClr val="9FE7D6"/>
+                </a:solidFill>
+                <a:latin typeface="Courier New" pitchFamily="34" charset="0"/>
+                <a:ea typeface="Courier New" pitchFamily="34" charset="-122"/>
+                <a:cs typeface="Courier New" pitchFamily="34" charset="-120"/>
+              </a:rPr>
+              <a:t>HARDCODED_KEY = b"0123..."    # CWE-798      -&gt;  bytes.fromhex(os.environ["ENC_KEY_HEX"])</a:t>
+            </a:r>
+            <a:endParaRPr lang="en-US" sz="1150" dirty="0"/>
+          </a:p>
+          <a:p>
+            <a:pPr indent="0" marL="0">
+              <a:buNone/>
+            </a:pPr>
+            <a:r>
+              <a:rPr lang="en-US" sz="1150" dirty="0">
+                <a:solidFill>
+                  <a:srgbClr val="9FE7D6"/>
+                </a:solidFill>
+                <a:latin typeface="Courier New" pitchFamily="34" charset="0"/>
+                <a:ea typeface="Courier New" pitchFamily="34" charset="-122"/>
+                <a:cs typeface="Courier New" pitchFamily="34" charset="-120"/>
+              </a:rPr>
+              <a:t>random.choice("0123456789")   # CWE-330      -&gt;  secrets.token_urlsafe(16)</a:t>
+            </a:r>
+            <a:endParaRPr lang="en-US" sz="1150" dirty="0"/>
+          </a:p>
+        </p:txBody>
+      </p:sp>
+      <p:sp>
+        <p:nvSpPr>
+          <p:cNvPr id="7" name="Shape 4"/>
+          <p:cNvSpPr/>
+          <p:nvPr/>
+        </p:nvSpPr>
+        <p:spPr>
+          <a:xfrm>
+            <a:off x="457200" y="2862072"/>
+            <a:ext cx="8229600" cy="1298448"/>
+          </a:xfrm>
+          <a:prstGeom prst="roundRect">
+            <a:avLst>
+              <a:gd name="adj" fmla="val 5634"/>
             </a:avLst>
           </a:prstGeom>
           <a:solidFill>
@@ -3466,14 +3965,14 @@
       </p:sp>
       <p:sp>
         <p:nvSpPr>
-          <p:cNvPr id="6" name="Text 3"/>
-          <p:cNvSpPr/>
-          <p:nvPr/>
-        </p:nvSpPr>
-        <p:spPr>
-          <a:xfrm>
-            <a:off x="731520" y="1435608"/>
-            <a:ext cx="7680960" cy="1591056"/>
+          <p:cNvPr id="8" name="Text 5"/>
+          <p:cNvSpPr/>
+          <p:nvPr/>
+        </p:nvSpPr>
+        <p:spPr>
+          <a:xfrm>
+            <a:off x="731520" y="2971800"/>
+            <a:ext cx="7680960" cy="1078992"/>
           </a:xfrm>
           <a:prstGeom prst="rect">
             <a:avLst/>
@@ -3503,7 +4002,7 @@
                 <a:ea typeface="Calibri" pitchFamily="34" charset="-122"/>
                 <a:cs typeface="Calibri" pitchFamily="34" charset="-120"/>
               </a:rPr>
-              <a:t>Round 1 (speedrun): crack unsalted/MD5 hashes — fastest team wins</a:t>
+              <a:t>Four separate decisions — KDF · cipher mode · key source · RNG — not one "use better crypto"</a:t>
             </a:r>
             <a:endParaRPr lang="en-US" sz="1400" dirty="0"/>
           </a:p>
@@ -3524,66 +4023,45 @@
                 <a:ea typeface="Calibri" pitchFamily="34" charset="-122"/>
                 <a:cs typeface="Calibri" pitchFamily="34" charset="-120"/>
               </a:rPr>
-              <a:t>Round 2: exploit an ECB oracle (identical blocks)</a:t>
+              <a:t>"Use AES" answers none of them: AES-ECB leaks; AES-GCM under a hardcoded key is still CWE-798</a:t>
             </a:r>
             <a:endParaRPr lang="en-US" sz="1400" dirty="0"/>
           </a:p>
-          <a:p>
-            <a:pPr marL="342900" indent="-342900">
-              <a:spcAft>
-                <a:spcPts val="600"/>
-              </a:spcAft>
-              <a:buSzPct val="100000"/>
-              <a:buChar char="•"/>
-            </a:pPr>
-            <a:r>
-              <a:rPr lang="en-US" sz="1400" dirty="0">
-                <a:solidFill>
-                  <a:srgbClr val="1F2937"/>
+        </p:txBody>
+      </p:sp>
+      <p:sp>
+        <p:nvSpPr>
+          <p:cNvPr id="9" name="Text 6"/>
+          <p:cNvSpPr/>
+          <p:nvPr/>
+        </p:nvSpPr>
+        <p:spPr>
+          <a:xfrm>
+            <a:off x="457200" y="4800600"/>
+            <a:ext cx="6949440" cy="274320"/>
+          </a:xfrm>
+          <a:prstGeom prst="rect">
+            <a:avLst/>
+          </a:prstGeom>
+          <a:noFill/>
+          <a:ln/>
+        </p:spPr>
+        <p:txBody>
+          <a:bodyPr wrap="square" lIns="0" tIns="0" rIns="0" bIns="0" rtlCol="0" anchor="ctr"/>
+          <a:lstStyle/>
+          <a:p>
+            <a:pPr indent="0" marL="0">
+              <a:buNone/>
+            </a:pPr>
+            <a:r>
+              <a:rPr lang="en-US" sz="900" dirty="0">
+                <a:solidFill>
+                  <a:srgbClr val="64748B"/>
                 </a:solidFill>
                 <a:latin typeface="Calibri" pitchFamily="34" charset="0"/>
                 <a:ea typeface="Calibri" pitchFamily="34" charset="-122"/>
                 <a:cs typeface="Calibri" pitchFamily="34" charset="-120"/>
               </a:rPr>
-              <a:t>Round 3 (defend): run the fixed version (argon2id + AES-GCM + keys from env) and confirm it holds — then author two pieces yourself: migrate a legacy MD5 record to argon2id on next login, and write the decrypt+tamper-check the fixed version doesn't include for you</a:t>
-            </a:r>
-            <a:endParaRPr lang="en-US" sz="1400" dirty="0"/>
-          </a:p>
-        </p:txBody>
-      </p:sp>
-      <p:sp>
-        <p:nvSpPr>
-          <p:cNvPr id="7" name="Text 4"/>
-          <p:cNvSpPr/>
-          <p:nvPr/>
-        </p:nvSpPr>
-        <p:spPr>
-          <a:xfrm>
-            <a:off x="457200" y="4800600"/>
-            <a:ext cx="6949440" cy="274320"/>
-          </a:xfrm>
-          <a:prstGeom prst="rect">
-            <a:avLst/>
-          </a:prstGeom>
-          <a:noFill/>
-          <a:ln/>
-        </p:spPr>
-        <p:txBody>
-          <a:bodyPr wrap="square" lIns="0" tIns="0" rIns="0" bIns="0" rtlCol="0" anchor="ctr"/>
-          <a:lstStyle/>
-          <a:p>
-            <a:pPr indent="0" marL="0">
-              <a:buNone/>
-            </a:pPr>
-            <a:r>
-              <a:rPr lang="en-US" sz="900" dirty="0">
-                <a:solidFill>
-                  <a:srgbClr val="64748B"/>
-                </a:solidFill>
-                <a:latin typeface="Calibri" pitchFamily="34" charset="0"/>
-                <a:ea typeface="Calibri" pitchFamily="34" charset="-122"/>
-                <a:cs typeface="Calibri" pitchFamily="34" charset="-120"/>
-              </a:rPr>
               <a:t>Software Security · Week 3</a:t>
             </a:r>
             <a:endParaRPr lang="en-US" sz="900" dirty="0"/>
@@ -3592,7 +4070,7 @@
       </p:sp>
       <p:pic>
         <p:nvPicPr>
-          <p:cNvPr id="8" name="Image 1" descr="/Users/pop7/Library/CloudStorage/OneDrive-MonsterConnectCo.,Ltd/Lecture/KOSEN69 - software-security/slides/pptx/assets/logo-small.png">    </p:cNvPr>
+          <p:cNvPr id="10" name="Image 1" descr="/Users/pop7/Library/CloudStorage/OneDrive-MonsterConnectCo.,Ltd/Lecture/KOSEN69 - software-security/slides/pptx/assets/logo-small.png">    </p:cNvPr>
           <p:cNvPicPr>
             <a:picLocks noChangeAspect="1"/>
           </p:cNvPicPr>
@@ -3730,7 +4208,7 @@
                 <a:ea typeface="Arial" pitchFamily="34" charset="-122"/>
                 <a:cs typeface="Arial" pitchFamily="34" charset="-120"/>
               </a:rPr>
-              <a:t>Lab 3 — deliverable</a:t>
+              <a:t>Four fixes — in the code (cont.)</a:t>
             </a:r>
             <a:endParaRPr lang="en-US" sz="2600" dirty="0"/>
           </a:p>
@@ -3745,74 +4223,11 @@
         <p:spPr>
           <a:xfrm>
             <a:off x="457200" y="1325880"/>
-            <a:ext cx="8229600" cy="822960"/>
+            <a:ext cx="8229600" cy="786384"/>
           </a:xfrm>
           <a:prstGeom prst="roundRect">
             <a:avLst>
-              <a:gd name="adj" fmla="val 8889"/>
-            </a:avLst>
-          </a:prstGeom>
-          <a:solidFill>
-            <a:srgbClr val="E8EDF3"/>
-          </a:solidFill>
-          <a:ln/>
-        </p:spPr>
-      </p:sp>
-      <p:sp>
-        <p:nvSpPr>
-          <p:cNvPr id="6" name="Text 3"/>
-          <p:cNvSpPr/>
-          <p:nvPr/>
-        </p:nvSpPr>
-        <p:spPr>
-          <a:xfrm>
-            <a:off x="731520" y="1325880"/>
-            <a:ext cx="7680960" cy="822960"/>
-          </a:xfrm>
-          <a:prstGeom prst="rect">
-            <a:avLst/>
-          </a:prstGeom>
-          <a:noFill/>
-          <a:ln/>
-        </p:spPr>
-        <p:txBody>
-          <a:bodyPr wrap="square" lIns="0" tIns="0" rIns="0" bIns="0" rtlCol="0" anchor="ctr">
-            <a:normAutofit/>
-          </a:bodyPr>
-          <a:lstStyle/>
-          <a:p>
-            <a:pPr indent="0" marL="0">
-              <a:buNone/>
-            </a:pPr>
-            <a:r>
-              <a:rPr lang="en-US" sz="1400" i="1" dirty="0">
-                <a:solidFill>
-                  <a:srgbClr val="E35205"/>
-                </a:solidFill>
-                <a:latin typeface="Calibri" pitchFamily="34" charset="0"/>
-                <a:ea typeface="Calibri" pitchFamily="34" charset="-122"/>
-                <a:cs typeface="Calibri" pitchFamily="34" charset="-120"/>
-              </a:rPr>
-              <a:t>📋 Worksheet 3 — labs/week03-cryptography/worksheet.md (Part 3) · kickoff: docker compose up (runs the crypto scripts)</a:t>
-            </a:r>
-            <a:endParaRPr lang="en-US" sz="1400" dirty="0"/>
-          </a:p>
-        </p:txBody>
-      </p:sp>
-      <p:sp>
-        <p:nvSpPr>
-          <p:cNvPr id="7" name="Shape 4"/>
-          <p:cNvSpPr/>
-          <p:nvPr/>
-        </p:nvSpPr>
-        <p:spPr>
-          <a:xfrm>
-            <a:off x="457200" y="2313432"/>
-            <a:ext cx="8229600" cy="1719072"/>
-          </a:xfrm>
-          <a:prstGeom prst="roundRect">
-            <a:avLst>
-              <a:gd name="adj" fmla="val 4255"/>
+              <a:gd name="adj" fmla="val 9302"/>
             </a:avLst>
           </a:prstGeom>
           <a:solidFill>
@@ -3830,14 +4245,14 @@
       </p:sp>
       <p:sp>
         <p:nvSpPr>
-          <p:cNvPr id="8" name="Text 5"/>
-          <p:cNvSpPr/>
-          <p:nvPr/>
-        </p:nvSpPr>
-        <p:spPr>
-          <a:xfrm>
-            <a:off x="731520" y="2423160"/>
-            <a:ext cx="7680960" cy="1499616"/>
+          <p:cNvPr id="6" name="Text 3"/>
+          <p:cNvSpPr/>
+          <p:nvPr/>
+        </p:nvSpPr>
+        <p:spPr>
+          <a:xfrm>
+            <a:off x="731520" y="1435608"/>
+            <a:ext cx="7680960" cy="566928"/>
           </a:xfrm>
           <a:prstGeom prst="rect">
             <a:avLst/>
@@ -3867,108 +4282,45 @@
                 <a:ea typeface="Calibri" pitchFamily="34" charset="-122"/>
                 <a:cs typeface="Calibri" pitchFamily="34" charset="-120"/>
               </a:rPr>
-              <a:t>Cracked hashes + method · ECB-leak proof · predictable-token note</a:t>
+              <a:t>Each fix makes the value unguessable / authenticated / unique, not merely "encrypted"</a:t>
             </a:r>
             <a:endParaRPr lang="en-US" sz="1400" dirty="0"/>
           </a:p>
-          <a:p>
-            <a:pPr marL="342900" indent="-342900">
-              <a:spcAft>
-                <a:spcPts val="600"/>
-              </a:spcAft>
-              <a:buSzPct val="100000"/>
-              <a:buChar char="•"/>
-            </a:pPr>
-            <a:r>
-              <a:rPr lang="en-US" sz="1400" dirty="0">
-                <a:solidFill>
-                  <a:srgbClr val="1F2937"/>
+        </p:txBody>
+      </p:sp>
+      <p:sp>
+        <p:nvSpPr>
+          <p:cNvPr id="7" name="Text 4"/>
+          <p:cNvSpPr/>
+          <p:nvPr/>
+        </p:nvSpPr>
+        <p:spPr>
+          <a:xfrm>
+            <a:off x="457200" y="4800600"/>
+            <a:ext cx="6949440" cy="274320"/>
+          </a:xfrm>
+          <a:prstGeom prst="rect">
+            <a:avLst/>
+          </a:prstGeom>
+          <a:noFill/>
+          <a:ln/>
+        </p:spPr>
+        <p:txBody>
+          <a:bodyPr wrap="square" lIns="0" tIns="0" rIns="0" bIns="0" rtlCol="0" anchor="ctr"/>
+          <a:lstStyle/>
+          <a:p>
+            <a:pPr indent="0" marL="0">
+              <a:buNone/>
+            </a:pPr>
+            <a:r>
+              <a:rPr lang="en-US" sz="900" dirty="0">
+                <a:solidFill>
+                  <a:srgbClr val="64748B"/>
                 </a:solidFill>
                 <a:latin typeface="Calibri" pitchFamily="34" charset="0"/>
                 <a:ea typeface="Calibri" pitchFamily="34" charset="-122"/>
                 <a:cs typeface="Calibri" pitchFamily="34" charset="-120"/>
               </a:rPr>
-              <a:t>Before/after code (misuse → fix → CWE closed) — incl. your rehash-on-login migration + GCM decrypt/tamper-check</a:t>
-            </a:r>
-            <a:endParaRPr lang="en-US" sz="1400" dirty="0"/>
-          </a:p>
-          <a:p>
-            <a:pPr marL="342900" indent="-342900">
-              <a:spcAft>
-                <a:spcPts val="600"/>
-              </a:spcAft>
-              <a:buSzPct val="100000"/>
-              <a:buChar char="•"/>
-            </a:pPr>
-            <a:r>
-              <a:rPr lang="en-US" sz="1400" dirty="0">
-                <a:solidFill>
-                  <a:srgbClr val="1F2937"/>
-                </a:solidFill>
-                <a:latin typeface="Calibri" pitchFamily="34" charset="0"/>
-                <a:ea typeface="Calibri" pitchFamily="34" charset="-122"/>
-                <a:cs typeface="Calibri" pitchFamily="34" charset="-120"/>
-              </a:rPr>
-              <a:t>TLS: read a real cert's issuer/subject/validity + negotiated protocol version</a:t>
-            </a:r>
-            <a:endParaRPr lang="en-US" sz="1400" dirty="0"/>
-          </a:p>
-          <a:p>
-            <a:pPr marL="342900" indent="-342900">
-              <a:spcAft>
-                <a:spcPts val="600"/>
-              </a:spcAft>
-              <a:buSzPct val="100000"/>
-              <a:buChar char="•"/>
-            </a:pPr>
-            <a:r>
-              <a:rPr lang="en-US" sz="1400" dirty="0">
-                <a:solidFill>
-                  <a:srgbClr val="1F2937"/>
-                </a:solidFill>
-                <a:latin typeface="Calibri" pitchFamily="34" charset="0"/>
-                <a:ea typeface="Calibri" pitchFamily="34" charset="-122"/>
-                <a:cs typeface="Calibri" pitchFamily="34" charset="-120"/>
-              </a:rPr>
-              <a:t>Crack NoteVault's own MD5 hashes for the term-project report</a:t>
-            </a:r>
-            <a:endParaRPr lang="en-US" sz="1400" dirty="0"/>
-          </a:p>
-        </p:txBody>
-      </p:sp>
-      <p:sp>
-        <p:nvSpPr>
-          <p:cNvPr id="9" name="Text 6"/>
-          <p:cNvSpPr/>
-          <p:nvPr/>
-        </p:nvSpPr>
-        <p:spPr>
-          <a:xfrm>
-            <a:off x="457200" y="4800600"/>
-            <a:ext cx="6949440" cy="274320"/>
-          </a:xfrm>
-          <a:prstGeom prst="rect">
-            <a:avLst/>
-          </a:prstGeom>
-          <a:noFill/>
-          <a:ln/>
-        </p:spPr>
-        <p:txBody>
-          <a:bodyPr wrap="square" lIns="0" tIns="0" rIns="0" bIns="0" rtlCol="0" anchor="ctr"/>
-          <a:lstStyle/>
-          <a:p>
-            <a:pPr indent="0" marL="0">
-              <a:buNone/>
-            </a:pPr>
-            <a:r>
-              <a:rPr lang="en-US" sz="900" dirty="0">
-                <a:solidFill>
-                  <a:srgbClr val="64748B"/>
-                </a:solidFill>
-                <a:latin typeface="Calibri" pitchFamily="34" charset="0"/>
-                <a:ea typeface="Calibri" pitchFamily="34" charset="-122"/>
-                <a:cs typeface="Calibri" pitchFamily="34" charset="-120"/>
-              </a:rPr>
               <a:t>Software Security · Week 3</a:t>
             </a:r>
             <a:endParaRPr lang="en-US" sz="900" dirty="0"/>
@@ -3977,7 +4329,7 @@
       </p:sp>
       <p:pic>
         <p:nvPicPr>
-          <p:cNvPr id="10" name="Image 1" descr="/Users/pop7/Library/CloudStorage/OneDrive-MonsterConnectCo.,Ltd/Lecture/KOSEN69 - software-security/slides/pptx/assets/logo-small.png">    </p:cNvPr>
+          <p:cNvPr id="8" name="Image 1" descr="/Users/pop7/Library/CloudStorage/OneDrive-MonsterConnectCo.,Ltd/Lecture/KOSEN69 - software-security/slides/pptx/assets/logo-small.png">    </p:cNvPr>
           <p:cNvPicPr>
             <a:picLocks noChangeAspect="1"/>
           </p:cNvPicPr>
@@ -4115,7 +4467,7 @@
                 <a:ea typeface="Arial" pitchFamily="34" charset="-122"/>
                 <a:cs typeface="Arial" pitchFamily="34" charset="-120"/>
               </a:rPr>
-              <a:t>Lab 3 — deliverable (cont.)</a:t>
+              <a:t>Four decisions, four fixes</a:t>
             </a:r>
             <a:endParaRPr lang="en-US" sz="2600" dirty="0"/>
           </a:p>
@@ -4123,43 +4475,14 @@
       </p:sp>
       <p:sp>
         <p:nvSpPr>
-          <p:cNvPr id="5" name="Shape 2"/>
-          <p:cNvSpPr/>
-          <p:nvPr/>
-        </p:nvSpPr>
-        <p:spPr>
-          <a:xfrm>
-            <a:off x="457200" y="1325880"/>
-            <a:ext cx="8229600" cy="1298448"/>
-          </a:xfrm>
-          <a:prstGeom prst="roundRect">
-            <a:avLst>
-              <a:gd name="adj" fmla="val 5634"/>
-            </a:avLst>
-          </a:prstGeom>
-          <a:solidFill>
-            <a:srgbClr val="F1F5F9"/>
-          </a:solidFill>
-          <a:ln/>
-          <a:effectLst>
-            <a:outerShdw sx="100000" sy="100000" kx="0" ky="0" algn="bl" rotWithShape="0" blurRad="76200" dist="25400" dir="5400000">
-              <a:srgbClr val="000000">
-                <a:alpha val="12000"/>
-              </a:srgbClr>
-            </a:outerShdw>
-          </a:effectLst>
-        </p:spPr>
-      </p:sp>
-      <p:sp>
-        <p:nvSpPr>
-          <p:cNvPr id="6" name="Text 3"/>
-          <p:cNvSpPr/>
-          <p:nvPr/>
-        </p:nvSpPr>
-        <p:spPr>
-          <a:xfrm>
-            <a:off x="731520" y="1435608"/>
-            <a:ext cx="7680960" cy="1078992"/>
+          <p:cNvPr id="5" name="Text 2"/>
+          <p:cNvSpPr/>
+          <p:nvPr/>
+        </p:nvSpPr>
+        <p:spPr>
+          <a:xfrm>
+            <a:off x="548640" y="1325880"/>
+            <a:ext cx="8046720" cy="1645920"/>
           </a:xfrm>
           <a:prstGeom prst="rect">
             <a:avLst/>
@@ -4173,12 +4496,8 @@
           </a:bodyPr>
           <a:lstStyle/>
           <a:p>
-            <a:pPr marL="342900" indent="-342900">
-              <a:spcAft>
-                <a:spcPts val="600"/>
-              </a:spcAft>
-              <a:buSzPct val="100000"/>
-              <a:buChar char="•"/>
+            <a:pPr indent="0" marL="0">
+              <a:buNone/>
             </a:pPr>
             <a:r>
               <a:rPr lang="en-US" sz="1400" dirty="0">
@@ -4189,66 +4508,45 @@
                 <a:ea typeface="Calibri" pitchFamily="34" charset="-122"/>
                 <a:cs typeface="Calibri" pitchFamily="34" charset="-120"/>
               </a:rPr>
-              <a:t>Every screenshot needs your whoami + student ID + timestamp in-frame — this lab's raw output is identical for the whole cohort by design, so unstamped evidence isn't gradable</a:t>
+              <a:t>See diagram: Four crypto misuses and their fixes: password storage (md5 to argon2id), cipher mode (hardcoded-key ECB to GCM with a nonce and auth tag), randomness (random.choice to secrets.token_urlsafe), and key source (hardcoded key to an environment variable). One cipher name answers none of these four questions — AES-GCM under a hardcoded key is still CWE-798. (web only)</a:t>
             </a:r>
             <a:endParaRPr lang="en-US" sz="1400" dirty="0"/>
           </a:p>
-          <a:p>
-            <a:pPr marL="342900" indent="-342900">
-              <a:spcAft>
-                <a:spcPts val="600"/>
-              </a:spcAft>
-              <a:buSzPct val="100000"/>
-              <a:buChar char="•"/>
-            </a:pPr>
-            <a:r>
-              <a:rPr lang="en-US" sz="1400" dirty="0">
-                <a:solidFill>
-                  <a:srgbClr val="1F2937"/>
+        </p:txBody>
+      </p:sp>
+      <p:sp>
+        <p:nvSpPr>
+          <p:cNvPr id="6" name="Text 3"/>
+          <p:cNvSpPr/>
+          <p:nvPr/>
+        </p:nvSpPr>
+        <p:spPr>
+          <a:xfrm>
+            <a:off x="457200" y="4800600"/>
+            <a:ext cx="6949440" cy="274320"/>
+          </a:xfrm>
+          <a:prstGeom prst="rect">
+            <a:avLst/>
+          </a:prstGeom>
+          <a:noFill/>
+          <a:ln/>
+        </p:spPr>
+        <p:txBody>
+          <a:bodyPr wrap="square" lIns="0" tIns="0" rIns="0" bIns="0" rtlCol="0" anchor="ctr"/>
+          <a:lstStyle/>
+          <a:p>
+            <a:pPr indent="0" marL="0">
+              <a:buNone/>
+            </a:pPr>
+            <a:r>
+              <a:rPr lang="en-US" sz="900" dirty="0">
+                <a:solidFill>
+                  <a:srgbClr val="64748B"/>
                 </a:solidFill>
                 <a:latin typeface="Calibri" pitchFamily="34" charset="0"/>
                 <a:ea typeface="Calibri" pitchFamily="34" charset="-122"/>
                 <a:cs typeface="Calibri" pitchFamily="34" charset="-120"/>
               </a:rPr>
-              <a:t>+ Audit the AI / EiPE / Prompt Problem (see worksheet)</a:t>
-            </a:r>
-            <a:endParaRPr lang="en-US" sz="1400" dirty="0"/>
-          </a:p>
-        </p:txBody>
-      </p:sp>
-      <p:sp>
-        <p:nvSpPr>
-          <p:cNvPr id="7" name="Text 4"/>
-          <p:cNvSpPr/>
-          <p:nvPr/>
-        </p:nvSpPr>
-        <p:spPr>
-          <a:xfrm>
-            <a:off x="457200" y="4800600"/>
-            <a:ext cx="6949440" cy="274320"/>
-          </a:xfrm>
-          <a:prstGeom prst="rect">
-            <a:avLst/>
-          </a:prstGeom>
-          <a:noFill/>
-          <a:ln/>
-        </p:spPr>
-        <p:txBody>
-          <a:bodyPr wrap="square" lIns="0" tIns="0" rIns="0" bIns="0" rtlCol="0" anchor="ctr"/>
-          <a:lstStyle/>
-          <a:p>
-            <a:pPr indent="0" marL="0">
-              <a:buNone/>
-            </a:pPr>
-            <a:r>
-              <a:rPr lang="en-US" sz="900" dirty="0">
-                <a:solidFill>
-                  <a:srgbClr val="64748B"/>
-                </a:solidFill>
-                <a:latin typeface="Calibri" pitchFamily="34" charset="0"/>
-                <a:ea typeface="Calibri" pitchFamily="34" charset="-122"/>
-                <a:cs typeface="Calibri" pitchFamily="34" charset="-120"/>
-              </a:rPr>
               <a:t>Software Security · Week 3</a:t>
             </a:r>
             <a:endParaRPr lang="en-US" sz="900" dirty="0"/>
@@ -4257,7 +4555,7 @@
       </p:sp>
       <p:pic>
         <p:nvPicPr>
-          <p:cNvPr id="8" name="Image 1" descr="/Users/pop7/Library/CloudStorage/OneDrive-MonsterConnectCo.,Ltd/Lecture/KOSEN69 - software-security/slides/pptx/assets/logo-small.png">    </p:cNvPr>
+          <p:cNvPr id="7" name="Image 1" descr="/Users/pop7/Library/CloudStorage/OneDrive-MonsterConnectCo.,Ltd/Lecture/KOSEN69 - software-security/slides/pptx/assets/logo-small.png">    </p:cNvPr>
           <p:cNvPicPr>
             <a:picLocks noChangeAspect="1"/>
           </p:cNvPicPr>
@@ -4395,7 +4693,7 @@
                 <a:ea typeface="Arial" pitchFamily="34" charset="-122"/>
                 <a:cs typeface="Arial" pitchFamily="34" charset="-120"/>
               </a:rPr>
-              <a:t>Key takeaways</a:t>
+              <a:t>🔓 Game — Capture the Hash</a:t>
             </a:r>
             <a:endParaRPr lang="en-US" sz="2600" dirty="0"/>
           </a:p>
@@ -4410,11 +4708,11 @@
         <p:spPr>
           <a:xfrm>
             <a:off x="457200" y="1325880"/>
-            <a:ext cx="8229600" cy="1207008"/>
+            <a:ext cx="8229600" cy="1810512"/>
           </a:xfrm>
           <a:prstGeom prst="roundRect">
             <a:avLst>
-              <a:gd name="adj" fmla="val 6061"/>
+              <a:gd name="adj" fmla="val 4040"/>
             </a:avLst>
           </a:prstGeom>
           <a:solidFill>
@@ -4439,7 +4737,7 @@
         <p:spPr>
           <a:xfrm>
             <a:off x="731520" y="1435608"/>
-            <a:ext cx="7680960" cy="987552"/>
+            <a:ext cx="7680960" cy="1591056"/>
           </a:xfrm>
           <a:prstGeom prst="rect">
             <a:avLst/>
@@ -4469,7 +4767,7 @@
                 <a:ea typeface="Calibri" pitchFamily="34" charset="-122"/>
                 <a:cs typeface="Calibri" pitchFamily="34" charset="-120"/>
               </a:rPr>
-              <a:t>Encoding ≠ encryption; hashing isn't reversible</a:t>
+              <a:t>Round 1 (speedrun): crack unsalted/MD5 hashes — fastest team wins</a:t>
             </a:r>
             <a:endParaRPr lang="en-US" sz="1400" dirty="0"/>
           </a:p>
@@ -4490,7 +4788,7 @@
                 <a:ea typeface="Calibri" pitchFamily="34" charset="-122"/>
                 <a:cs typeface="Calibri" pitchFamily="34" charset="-120"/>
               </a:rPr>
-              <a:t>Use vetted KDFs + authenticated encryption — never roll your own</a:t>
+              <a:t>Round 2: exploit an ECB oracle (identical blocks)</a:t>
             </a:r>
             <a:endParaRPr lang="en-US" sz="1400" dirty="0"/>
           </a:p>
@@ -4511,7 +4809,7 @@
                 <a:ea typeface="Calibri" pitchFamily="34" charset="-122"/>
                 <a:cs typeface="Calibri" pitchFamily="34" charset="-120"/>
               </a:rPr>
-              <a:t>Randomness &amp; key handling matter as much as the algorithm</a:t>
+              <a:t>Round 3 (defend): run the fixed version (argon2id + AES-GCM + keys from env) and confirm it holds — then author two pieces yourself: migrate a legacy MD5 record to argon2id on next login, and write the decrypt+tamper-check the fixed version doesn't include for you</a:t>
             </a:r>
             <a:endParaRPr lang="en-US" sz="1400" dirty="0"/>
           </a:p>
@@ -4614,14 +4912,65 @@
       </p:grpSpPr>
       <p:sp>
         <p:nvSpPr>
-          <p:cNvPr id="2" name="Text 0"/>
-          <p:cNvSpPr/>
-          <p:nvPr/>
-        </p:nvSpPr>
-        <p:spPr>
-          <a:xfrm>
-            <a:off x="640080" y="1737360"/>
-            <a:ext cx="7863840" cy="1097280"/>
+          <p:cNvPr id="2" name="Shape 0"/>
+          <p:cNvSpPr/>
+          <p:nvPr/>
+        </p:nvSpPr>
+        <p:spPr>
+          <a:xfrm>
+            <a:off x="457200" y="384048"/>
+            <a:ext cx="530352" cy="530352"/>
+          </a:xfrm>
+          <a:prstGeom prst="ellipse">
+            <a:avLst/>
+          </a:prstGeom>
+          <a:solidFill>
+            <a:srgbClr val="E35205"/>
+          </a:solidFill>
+          <a:ln/>
+          <a:effectLst>
+            <a:outerShdw sx="100000" sy="100000" kx="0" ky="0" algn="bl" rotWithShape="0" blurRad="76200" dist="25400" dir="5400000">
+              <a:srgbClr val="000000">
+                <a:alpha val="12000"/>
+              </a:srgbClr>
+            </a:outerShdw>
+          </a:effectLst>
+        </p:spPr>
+      </p:sp>
+      <p:pic>
+        <p:nvPicPr>
+          <p:cNvPr id="3" name="Image 0" descr="preencoded.png">    </p:cNvPr>
+          <p:cNvPicPr>
+            <a:picLocks noChangeAspect="1"/>
+          </p:cNvPicPr>
+          <p:nvPr/>
+        </p:nvPicPr>
+        <p:blipFill>
+          <a:blip r:embed="rId1"/>
+          <a:stretch>
+            <a:fillRect/>
+          </a:stretch>
+        </p:blipFill>
+        <p:spPr>
+          <a:xfrm>
+            <a:off x="594360" y="521208"/>
+            <a:ext cx="256032" cy="256032"/>
+          </a:xfrm>
+          <a:prstGeom prst="rect">
+            <a:avLst/>
+          </a:prstGeom>
+        </p:spPr>
+      </p:pic>
+      <p:sp>
+        <p:nvSpPr>
+          <p:cNvPr id="4" name="Text 1"/>
+          <p:cNvSpPr/>
+          <p:nvPr/>
+        </p:nvSpPr>
+        <p:spPr>
+          <a:xfrm>
+            <a:off x="1143000" y="329184"/>
+            <a:ext cx="7498080" cy="603504"/>
           </a:xfrm>
           <a:prstGeom prst="rect">
             <a:avLst/>
@@ -4637,7 +4986,7 @@
               <a:buNone/>
             </a:pPr>
             <a:r>
-              <a:rPr lang="en-US" sz="4600" b="1" dirty="0">
+              <a:rPr lang="en-US" sz="2600" b="1" dirty="0">
                 <a:solidFill>
                   <a:srgbClr val="1F2937"/>
                 </a:solidFill>
@@ -4645,22 +4994,44 @@
                 <a:ea typeface="Arial" pitchFamily="34" charset="-122"/>
                 <a:cs typeface="Arial" pitchFamily="34" charset="-120"/>
               </a:rPr>
-              <a:t>Questions?</a:t>
-            </a:r>
-            <a:endParaRPr lang="en-US" sz="4600" dirty="0"/>
-          </a:p>
-        </p:txBody>
-      </p:sp>
-      <p:sp>
-        <p:nvSpPr>
-          <p:cNvPr id="3" name="Text 1"/>
-          <p:cNvSpPr/>
-          <p:nvPr/>
-        </p:nvSpPr>
-        <p:spPr>
-          <a:xfrm>
-            <a:off x="658368" y="2834640"/>
-            <a:ext cx="7863840" cy="731520"/>
+              <a:t>Lab 3 — deliverable</a:t>
+            </a:r>
+            <a:endParaRPr lang="en-US" sz="2600" dirty="0"/>
+          </a:p>
+        </p:txBody>
+      </p:sp>
+      <p:sp>
+        <p:nvSpPr>
+          <p:cNvPr id="5" name="Shape 2"/>
+          <p:cNvSpPr/>
+          <p:nvPr/>
+        </p:nvSpPr>
+        <p:spPr>
+          <a:xfrm>
+            <a:off x="457200" y="1325880"/>
+            <a:ext cx="8229600" cy="822960"/>
+          </a:xfrm>
+          <a:prstGeom prst="roundRect">
+            <a:avLst>
+              <a:gd name="adj" fmla="val 8889"/>
+            </a:avLst>
+          </a:prstGeom>
+          <a:solidFill>
+            <a:srgbClr val="E8EDF3"/>
+          </a:solidFill>
+          <a:ln/>
+        </p:spPr>
+      </p:sp>
+      <p:sp>
+        <p:nvSpPr>
+          <p:cNvPr id="6" name="Text 3"/>
+          <p:cNvSpPr/>
+          <p:nvPr/>
+        </p:nvSpPr>
+        <p:spPr>
+          <a:xfrm>
+            <a:off x="731520" y="1325880"/>
+            <a:ext cx="7680960" cy="822960"/>
           </a:xfrm>
           <a:prstGeom prst="rect">
             <a:avLst/>
@@ -4669,14 +5040,16 @@
           <a:ln/>
         </p:spPr>
         <p:txBody>
-          <a:bodyPr wrap="square" lIns="0" tIns="0" rIns="0" bIns="0" rtlCol="0" anchor="ctr"/>
+          <a:bodyPr wrap="square" lIns="0" tIns="0" rIns="0" bIns="0" rtlCol="0" anchor="ctr">
+            <a:normAutofit/>
+          </a:bodyPr>
           <a:lstStyle/>
           <a:p>
             <a:pPr indent="0" marL="0">
               <a:buNone/>
             </a:pPr>
             <a:r>
-              <a:rPr lang="en-US" sz="1800" dirty="0">
+              <a:rPr lang="en-US" sz="1400" i="1" dirty="0">
                 <a:solidFill>
                   <a:srgbClr val="E35205"/>
                 </a:solidFill>
@@ -4684,22 +5057,779 @@
                 <a:ea typeface="Calibri" pitchFamily="34" charset="-122"/>
                 <a:cs typeface="Calibri" pitchFamily="34" charset="-120"/>
               </a:rPr>
-              <a:t>Next week: Injection &amp; input handling</a:t>
-            </a:r>
-            <a:endParaRPr lang="en-US" sz="1800" dirty="0"/>
+              <a:t>📋 Worksheet 3 — labs/week03-cryptography/worksheet.md (Part 3) · kickoff: docker compose up (runs the crypto scripts)</a:t>
+            </a:r>
+            <a:endParaRPr lang="en-US" sz="1400" dirty="0"/>
+          </a:p>
+        </p:txBody>
+      </p:sp>
+      <p:sp>
+        <p:nvSpPr>
+          <p:cNvPr id="7" name="Shape 4"/>
+          <p:cNvSpPr/>
+          <p:nvPr/>
+        </p:nvSpPr>
+        <p:spPr>
+          <a:xfrm>
+            <a:off x="457200" y="2313432"/>
+            <a:ext cx="8229600" cy="1719072"/>
+          </a:xfrm>
+          <a:prstGeom prst="roundRect">
+            <a:avLst>
+              <a:gd name="adj" fmla="val 4255"/>
+            </a:avLst>
+          </a:prstGeom>
+          <a:solidFill>
+            <a:srgbClr val="F1F5F9"/>
+          </a:solidFill>
+          <a:ln/>
+          <a:effectLst>
+            <a:outerShdw sx="100000" sy="100000" kx="0" ky="0" algn="bl" rotWithShape="0" blurRad="76200" dist="25400" dir="5400000">
+              <a:srgbClr val="000000">
+                <a:alpha val="12000"/>
+              </a:srgbClr>
+            </a:outerShdw>
+          </a:effectLst>
+        </p:spPr>
+      </p:sp>
+      <p:sp>
+        <p:nvSpPr>
+          <p:cNvPr id="8" name="Text 5"/>
+          <p:cNvSpPr/>
+          <p:nvPr/>
+        </p:nvSpPr>
+        <p:spPr>
+          <a:xfrm>
+            <a:off x="731520" y="2423160"/>
+            <a:ext cx="7680960" cy="1499616"/>
+          </a:xfrm>
+          <a:prstGeom prst="rect">
+            <a:avLst/>
+          </a:prstGeom>
+          <a:noFill/>
+          <a:ln/>
+        </p:spPr>
+        <p:txBody>
+          <a:bodyPr wrap="square" lIns="0" tIns="0" rIns="0" bIns="0" rtlCol="0" anchor="t">
+            <a:normAutofit/>
+          </a:bodyPr>
+          <a:lstStyle/>
+          <a:p>
+            <a:pPr marL="342900" indent="-342900">
+              <a:spcAft>
+                <a:spcPts val="600"/>
+              </a:spcAft>
+              <a:buSzPct val="100000"/>
+              <a:buChar char="•"/>
+            </a:pPr>
+            <a:r>
+              <a:rPr lang="en-US" sz="1400" dirty="0">
+                <a:solidFill>
+                  <a:srgbClr val="1F2937"/>
+                </a:solidFill>
+                <a:latin typeface="Calibri" pitchFamily="34" charset="0"/>
+                <a:ea typeface="Calibri" pitchFamily="34" charset="-122"/>
+                <a:cs typeface="Calibri" pitchFamily="34" charset="-120"/>
+              </a:rPr>
+              <a:t>Cracked hashes + method · ECB-leak proof · predictable-token note</a:t>
+            </a:r>
+            <a:endParaRPr lang="en-US" sz="1400" dirty="0"/>
+          </a:p>
+          <a:p>
+            <a:pPr marL="342900" indent="-342900">
+              <a:spcAft>
+                <a:spcPts val="600"/>
+              </a:spcAft>
+              <a:buSzPct val="100000"/>
+              <a:buChar char="•"/>
+            </a:pPr>
+            <a:r>
+              <a:rPr lang="en-US" sz="1400" dirty="0">
+                <a:solidFill>
+                  <a:srgbClr val="1F2937"/>
+                </a:solidFill>
+                <a:latin typeface="Calibri" pitchFamily="34" charset="0"/>
+                <a:ea typeface="Calibri" pitchFamily="34" charset="-122"/>
+                <a:cs typeface="Calibri" pitchFamily="34" charset="-120"/>
+              </a:rPr>
+              <a:t>Before/after code (misuse → fix → CWE closed) — incl. your rehash-on-login migration + GCM decrypt/tamper-check</a:t>
+            </a:r>
+            <a:endParaRPr lang="en-US" sz="1400" dirty="0"/>
+          </a:p>
+          <a:p>
+            <a:pPr marL="342900" indent="-342900">
+              <a:spcAft>
+                <a:spcPts val="600"/>
+              </a:spcAft>
+              <a:buSzPct val="100000"/>
+              <a:buChar char="•"/>
+            </a:pPr>
+            <a:r>
+              <a:rPr lang="en-US" sz="1400" dirty="0">
+                <a:solidFill>
+                  <a:srgbClr val="1F2937"/>
+                </a:solidFill>
+                <a:latin typeface="Calibri" pitchFamily="34" charset="0"/>
+                <a:ea typeface="Calibri" pitchFamily="34" charset="-122"/>
+                <a:cs typeface="Calibri" pitchFamily="34" charset="-120"/>
+              </a:rPr>
+              <a:t>TLS: read a real cert's issuer/subject/validity + negotiated protocol version</a:t>
+            </a:r>
+            <a:endParaRPr lang="en-US" sz="1400" dirty="0"/>
+          </a:p>
+          <a:p>
+            <a:pPr marL="342900" indent="-342900">
+              <a:spcAft>
+                <a:spcPts val="600"/>
+              </a:spcAft>
+              <a:buSzPct val="100000"/>
+              <a:buChar char="•"/>
+            </a:pPr>
+            <a:r>
+              <a:rPr lang="en-US" sz="1400" dirty="0">
+                <a:solidFill>
+                  <a:srgbClr val="1F2937"/>
+                </a:solidFill>
+                <a:latin typeface="Calibri" pitchFamily="34" charset="0"/>
+                <a:ea typeface="Calibri" pitchFamily="34" charset="-122"/>
+                <a:cs typeface="Calibri" pitchFamily="34" charset="-120"/>
+              </a:rPr>
+              <a:t>Crack NoteVault's own MD5 hashes for the term-project report</a:t>
+            </a:r>
+            <a:endParaRPr lang="en-US" sz="1400" dirty="0"/>
+          </a:p>
+        </p:txBody>
+      </p:sp>
+      <p:sp>
+        <p:nvSpPr>
+          <p:cNvPr id="9" name="Text 6"/>
+          <p:cNvSpPr/>
+          <p:nvPr/>
+        </p:nvSpPr>
+        <p:spPr>
+          <a:xfrm>
+            <a:off x="457200" y="4800600"/>
+            <a:ext cx="6949440" cy="274320"/>
+          </a:xfrm>
+          <a:prstGeom prst="rect">
+            <a:avLst/>
+          </a:prstGeom>
+          <a:noFill/>
+          <a:ln/>
+        </p:spPr>
+        <p:txBody>
+          <a:bodyPr wrap="square" lIns="0" tIns="0" rIns="0" bIns="0" rtlCol="0" anchor="ctr"/>
+          <a:lstStyle/>
+          <a:p>
+            <a:pPr indent="0" marL="0">
+              <a:buNone/>
+            </a:pPr>
+            <a:r>
+              <a:rPr lang="en-US" sz="900" dirty="0">
+                <a:solidFill>
+                  <a:srgbClr val="64748B"/>
+                </a:solidFill>
+                <a:latin typeface="Calibri" pitchFamily="34" charset="0"/>
+                <a:ea typeface="Calibri" pitchFamily="34" charset="-122"/>
+                <a:cs typeface="Calibri" pitchFamily="34" charset="-120"/>
+              </a:rPr>
+              <a:t>Software Security · Week 3</a:t>
+            </a:r>
+            <a:endParaRPr lang="en-US" sz="900" dirty="0"/>
           </a:p>
         </p:txBody>
       </p:sp>
       <p:pic>
         <p:nvPicPr>
-          <p:cNvPr id="4" name="Image 0" descr="/Users/pop7/Library/CloudStorage/OneDrive-MonsterConnectCo.,Ltd/Lecture/KOSEN69 - software-security/slides/pptx/assets/logo-small.png">    </p:cNvPr>
+          <p:cNvPr id="10" name="Image 1" descr="/Users/pop7/Library/CloudStorage/OneDrive-MonsterConnectCo.,Ltd/Lecture/KOSEN69 - software-security/slides/pptx/assets/logo-small.png">    </p:cNvPr>
           <p:cNvPicPr>
             <a:picLocks noChangeAspect="1"/>
           </p:cNvPicPr>
           <p:nvPr/>
         </p:nvPicPr>
         <p:blipFill>
+          <a:blip r:embed="rId2"/>
+          <a:stretch>
+            <a:fillRect/>
+          </a:stretch>
+        </p:blipFill>
+        <p:spPr>
+          <a:xfrm>
+            <a:off x="7882128" y="4700016"/>
+            <a:ext cx="768096" cy="356616"/>
+          </a:xfrm>
+          <a:prstGeom prst="rect">
+            <a:avLst/>
+          </a:prstGeom>
+        </p:spPr>
+      </p:pic>
+    </p:spTree>
+  </p:cSld>
+  <p:clrMapOvr>
+    <a:masterClrMapping/>
+  </p:clrMapOvr>
+</p:sld>
+</file>
+
+<file path=ppt/slides/slide18.xml><?xml version="1.0" encoding="utf-8"?>
+<p:sld xmlns:a="http://schemas.openxmlformats.org/drawingml/2006/main" xmlns:r="http://schemas.openxmlformats.org/officeDocument/2006/relationships" xmlns:p="http://schemas.openxmlformats.org/presentationml/2006/main">
+  <p:cSld name="Slide 18">
+    <p:bg>
+      <p:bgPr>
+        <a:solidFill>
+          <a:srgbClr val="FFFFFF"/>
+        </a:solidFill>
+      </p:bgPr>
+    </p:bg>
+    <p:spTree>
+      <p:nvGrpSpPr>
+        <p:cNvPr id="1" name=""/>
+        <p:cNvGrpSpPr/>
+        <p:nvPr/>
+      </p:nvGrpSpPr>
+      <p:grpSpPr>
+        <a:xfrm>
+          <a:off x="0" y="0"/>
+          <a:ext cx="0" cy="0"/>
+          <a:chOff x="0" y="0"/>
+          <a:chExt cx="0" cy="0"/>
+        </a:xfrm>
+      </p:grpSpPr>
+      <p:sp>
+        <p:nvSpPr>
+          <p:cNvPr id="2" name="Shape 0"/>
+          <p:cNvSpPr/>
+          <p:nvPr/>
+        </p:nvSpPr>
+        <p:spPr>
+          <a:xfrm>
+            <a:off x="457200" y="384048"/>
+            <a:ext cx="530352" cy="530352"/>
+          </a:xfrm>
+          <a:prstGeom prst="ellipse">
+            <a:avLst/>
+          </a:prstGeom>
+          <a:solidFill>
+            <a:srgbClr val="E35205"/>
+          </a:solidFill>
+          <a:ln/>
+          <a:effectLst>
+            <a:outerShdw sx="100000" sy="100000" kx="0" ky="0" algn="bl" rotWithShape="0" blurRad="76200" dist="25400" dir="5400000">
+              <a:srgbClr val="000000">
+                <a:alpha val="12000"/>
+              </a:srgbClr>
+            </a:outerShdw>
+          </a:effectLst>
+        </p:spPr>
+      </p:sp>
+      <p:pic>
+        <p:nvPicPr>
+          <p:cNvPr id="3" name="Image 0" descr="preencoded.png">    </p:cNvPr>
+          <p:cNvPicPr>
+            <a:picLocks noChangeAspect="1"/>
+          </p:cNvPicPr>
+          <p:nvPr/>
+        </p:nvPicPr>
+        <p:blipFill>
           <a:blip r:embed="rId1"/>
+          <a:stretch>
+            <a:fillRect/>
+          </a:stretch>
+        </p:blipFill>
+        <p:spPr>
+          <a:xfrm>
+            <a:off x="594360" y="521208"/>
+            <a:ext cx="256032" cy="256032"/>
+          </a:xfrm>
+          <a:prstGeom prst="rect">
+            <a:avLst/>
+          </a:prstGeom>
+        </p:spPr>
+      </p:pic>
+      <p:sp>
+        <p:nvSpPr>
+          <p:cNvPr id="4" name="Text 1"/>
+          <p:cNvSpPr/>
+          <p:nvPr/>
+        </p:nvSpPr>
+        <p:spPr>
+          <a:xfrm>
+            <a:off x="1143000" y="329184"/>
+            <a:ext cx="7498080" cy="603504"/>
+          </a:xfrm>
+          <a:prstGeom prst="rect">
+            <a:avLst/>
+          </a:prstGeom>
+          <a:noFill/>
+          <a:ln/>
+        </p:spPr>
+        <p:txBody>
+          <a:bodyPr wrap="square" lIns="0" tIns="0" rIns="0" bIns="0" rtlCol="0" anchor="ctr"/>
+          <a:lstStyle/>
+          <a:p>
+            <a:pPr indent="0" marL="0">
+              <a:buNone/>
+            </a:pPr>
+            <a:r>
+              <a:rPr lang="en-US" sz="2600" b="1" dirty="0">
+                <a:solidFill>
+                  <a:srgbClr val="1F2937"/>
+                </a:solidFill>
+                <a:latin typeface="Arial" pitchFamily="34" charset="0"/>
+                <a:ea typeface="Arial" pitchFamily="34" charset="-122"/>
+                <a:cs typeface="Arial" pitchFamily="34" charset="-120"/>
+              </a:rPr>
+              <a:t>Lab 3 — deliverable (cont.)</a:t>
+            </a:r>
+            <a:endParaRPr lang="en-US" sz="2600" dirty="0"/>
+          </a:p>
+        </p:txBody>
+      </p:sp>
+      <p:sp>
+        <p:nvSpPr>
+          <p:cNvPr id="5" name="Shape 2"/>
+          <p:cNvSpPr/>
+          <p:nvPr/>
+        </p:nvSpPr>
+        <p:spPr>
+          <a:xfrm>
+            <a:off x="457200" y="1325880"/>
+            <a:ext cx="8229600" cy="1298448"/>
+          </a:xfrm>
+          <a:prstGeom prst="roundRect">
+            <a:avLst>
+              <a:gd name="adj" fmla="val 5634"/>
+            </a:avLst>
+          </a:prstGeom>
+          <a:solidFill>
+            <a:srgbClr val="F1F5F9"/>
+          </a:solidFill>
+          <a:ln/>
+          <a:effectLst>
+            <a:outerShdw sx="100000" sy="100000" kx="0" ky="0" algn="bl" rotWithShape="0" blurRad="76200" dist="25400" dir="5400000">
+              <a:srgbClr val="000000">
+                <a:alpha val="12000"/>
+              </a:srgbClr>
+            </a:outerShdw>
+          </a:effectLst>
+        </p:spPr>
+      </p:sp>
+      <p:sp>
+        <p:nvSpPr>
+          <p:cNvPr id="6" name="Text 3"/>
+          <p:cNvSpPr/>
+          <p:nvPr/>
+        </p:nvSpPr>
+        <p:spPr>
+          <a:xfrm>
+            <a:off x="731520" y="1435608"/>
+            <a:ext cx="7680960" cy="1078992"/>
+          </a:xfrm>
+          <a:prstGeom prst="rect">
+            <a:avLst/>
+          </a:prstGeom>
+          <a:noFill/>
+          <a:ln/>
+        </p:spPr>
+        <p:txBody>
+          <a:bodyPr wrap="square" lIns="0" tIns="0" rIns="0" bIns="0" rtlCol="0" anchor="t">
+            <a:normAutofit/>
+          </a:bodyPr>
+          <a:lstStyle/>
+          <a:p>
+            <a:pPr marL="342900" indent="-342900">
+              <a:spcAft>
+                <a:spcPts val="600"/>
+              </a:spcAft>
+              <a:buSzPct val="100000"/>
+              <a:buChar char="•"/>
+            </a:pPr>
+            <a:r>
+              <a:rPr lang="en-US" sz="1400" dirty="0">
+                <a:solidFill>
+                  <a:srgbClr val="1F2937"/>
+                </a:solidFill>
+                <a:latin typeface="Calibri" pitchFamily="34" charset="0"/>
+                <a:ea typeface="Calibri" pitchFamily="34" charset="-122"/>
+                <a:cs typeface="Calibri" pitchFamily="34" charset="-120"/>
+              </a:rPr>
+              <a:t>Every screenshot needs your whoami + student ID + timestamp in-frame — this lab's raw output is identical for the whole cohort by design, so unstamped evidence isn't gradable</a:t>
+            </a:r>
+            <a:endParaRPr lang="en-US" sz="1400" dirty="0"/>
+          </a:p>
+          <a:p>
+            <a:pPr marL="342900" indent="-342900">
+              <a:spcAft>
+                <a:spcPts val="600"/>
+              </a:spcAft>
+              <a:buSzPct val="100000"/>
+              <a:buChar char="•"/>
+            </a:pPr>
+            <a:r>
+              <a:rPr lang="en-US" sz="1400" dirty="0">
+                <a:solidFill>
+                  <a:srgbClr val="1F2937"/>
+                </a:solidFill>
+                <a:latin typeface="Calibri" pitchFamily="34" charset="0"/>
+                <a:ea typeface="Calibri" pitchFamily="34" charset="-122"/>
+                <a:cs typeface="Calibri" pitchFamily="34" charset="-120"/>
+              </a:rPr>
+              <a:t>+ Audit the AI / EiPE / Prompt Problem (see worksheet)</a:t>
+            </a:r>
+            <a:endParaRPr lang="en-US" sz="1400" dirty="0"/>
+          </a:p>
+        </p:txBody>
+      </p:sp>
+      <p:sp>
+        <p:nvSpPr>
+          <p:cNvPr id="7" name="Text 4"/>
+          <p:cNvSpPr/>
+          <p:nvPr/>
+        </p:nvSpPr>
+        <p:spPr>
+          <a:xfrm>
+            <a:off x="457200" y="4800600"/>
+            <a:ext cx="6949440" cy="274320"/>
+          </a:xfrm>
+          <a:prstGeom prst="rect">
+            <a:avLst/>
+          </a:prstGeom>
+          <a:noFill/>
+          <a:ln/>
+        </p:spPr>
+        <p:txBody>
+          <a:bodyPr wrap="square" lIns="0" tIns="0" rIns="0" bIns="0" rtlCol="0" anchor="ctr"/>
+          <a:lstStyle/>
+          <a:p>
+            <a:pPr indent="0" marL="0">
+              <a:buNone/>
+            </a:pPr>
+            <a:r>
+              <a:rPr lang="en-US" sz="900" dirty="0">
+                <a:solidFill>
+                  <a:srgbClr val="64748B"/>
+                </a:solidFill>
+                <a:latin typeface="Calibri" pitchFamily="34" charset="0"/>
+                <a:ea typeface="Calibri" pitchFamily="34" charset="-122"/>
+                <a:cs typeface="Calibri" pitchFamily="34" charset="-120"/>
+              </a:rPr>
+              <a:t>Software Security · Week 3</a:t>
+            </a:r>
+            <a:endParaRPr lang="en-US" sz="900" dirty="0"/>
+          </a:p>
+        </p:txBody>
+      </p:sp>
+      <p:pic>
+        <p:nvPicPr>
+          <p:cNvPr id="8" name="Image 1" descr="/Users/pop7/Library/CloudStorage/OneDrive-MonsterConnectCo.,Ltd/Lecture/KOSEN69 - software-security/slides/pptx/assets/logo-small.png">    </p:cNvPr>
+          <p:cNvPicPr>
+            <a:picLocks noChangeAspect="1"/>
+          </p:cNvPicPr>
+          <p:nvPr/>
+        </p:nvPicPr>
+        <p:blipFill>
+          <a:blip r:embed="rId2"/>
+          <a:stretch>
+            <a:fillRect/>
+          </a:stretch>
+        </p:blipFill>
+        <p:spPr>
+          <a:xfrm>
+            <a:off x="7882128" y="4700016"/>
+            <a:ext cx="768096" cy="356616"/>
+          </a:xfrm>
+          <a:prstGeom prst="rect">
+            <a:avLst/>
+          </a:prstGeom>
+        </p:spPr>
+      </p:pic>
+    </p:spTree>
+  </p:cSld>
+  <p:clrMapOvr>
+    <a:masterClrMapping/>
+  </p:clrMapOvr>
+</p:sld>
+</file>
+
+<file path=ppt/slides/slide19.xml><?xml version="1.0" encoding="utf-8"?>
+<p:sld xmlns:a="http://schemas.openxmlformats.org/drawingml/2006/main" xmlns:r="http://schemas.openxmlformats.org/officeDocument/2006/relationships" xmlns:p="http://schemas.openxmlformats.org/presentationml/2006/main">
+  <p:cSld name="Slide 19">
+    <p:bg>
+      <p:bgPr>
+        <a:solidFill>
+          <a:srgbClr val="FFFFFF"/>
+        </a:solidFill>
+      </p:bgPr>
+    </p:bg>
+    <p:spTree>
+      <p:nvGrpSpPr>
+        <p:cNvPr id="1" name=""/>
+        <p:cNvGrpSpPr/>
+        <p:nvPr/>
+      </p:nvGrpSpPr>
+      <p:grpSpPr>
+        <a:xfrm>
+          <a:off x="0" y="0"/>
+          <a:ext cx="0" cy="0"/>
+          <a:chOff x="0" y="0"/>
+          <a:chExt cx="0" cy="0"/>
+        </a:xfrm>
+      </p:grpSpPr>
+      <p:sp>
+        <p:nvSpPr>
+          <p:cNvPr id="2" name="Shape 0"/>
+          <p:cNvSpPr/>
+          <p:nvPr/>
+        </p:nvSpPr>
+        <p:spPr>
+          <a:xfrm>
+            <a:off x="457200" y="384048"/>
+            <a:ext cx="530352" cy="530352"/>
+          </a:xfrm>
+          <a:prstGeom prst="ellipse">
+            <a:avLst/>
+          </a:prstGeom>
+          <a:solidFill>
+            <a:srgbClr val="E35205"/>
+          </a:solidFill>
+          <a:ln/>
+          <a:effectLst>
+            <a:outerShdw sx="100000" sy="100000" kx="0" ky="0" algn="bl" rotWithShape="0" blurRad="76200" dist="25400" dir="5400000">
+              <a:srgbClr val="000000">
+                <a:alpha val="12000"/>
+              </a:srgbClr>
+            </a:outerShdw>
+          </a:effectLst>
+        </p:spPr>
+      </p:sp>
+      <p:pic>
+        <p:nvPicPr>
+          <p:cNvPr id="3" name="Image 0" descr="preencoded.png">    </p:cNvPr>
+          <p:cNvPicPr>
+            <a:picLocks noChangeAspect="1"/>
+          </p:cNvPicPr>
+          <p:nvPr/>
+        </p:nvPicPr>
+        <p:blipFill>
+          <a:blip r:embed="rId1"/>
+          <a:stretch>
+            <a:fillRect/>
+          </a:stretch>
+        </p:blipFill>
+        <p:spPr>
+          <a:xfrm>
+            <a:off x="594360" y="521208"/>
+            <a:ext cx="256032" cy="256032"/>
+          </a:xfrm>
+          <a:prstGeom prst="rect">
+            <a:avLst/>
+          </a:prstGeom>
+        </p:spPr>
+      </p:pic>
+      <p:sp>
+        <p:nvSpPr>
+          <p:cNvPr id="4" name="Text 1"/>
+          <p:cNvSpPr/>
+          <p:nvPr/>
+        </p:nvSpPr>
+        <p:spPr>
+          <a:xfrm>
+            <a:off x="1143000" y="329184"/>
+            <a:ext cx="7498080" cy="603504"/>
+          </a:xfrm>
+          <a:prstGeom prst="rect">
+            <a:avLst/>
+          </a:prstGeom>
+          <a:noFill/>
+          <a:ln/>
+        </p:spPr>
+        <p:txBody>
+          <a:bodyPr wrap="square" lIns="0" tIns="0" rIns="0" bIns="0" rtlCol="0" anchor="ctr"/>
+          <a:lstStyle/>
+          <a:p>
+            <a:pPr indent="0" marL="0">
+              <a:buNone/>
+            </a:pPr>
+            <a:r>
+              <a:rPr lang="en-US" sz="2600" b="1" dirty="0">
+                <a:solidFill>
+                  <a:srgbClr val="1F2937"/>
+                </a:solidFill>
+                <a:latin typeface="Arial" pitchFamily="34" charset="0"/>
+                <a:ea typeface="Arial" pitchFamily="34" charset="-122"/>
+                <a:cs typeface="Arial" pitchFamily="34" charset="-120"/>
+              </a:rPr>
+              <a:t>Key takeaways</a:t>
+            </a:r>
+            <a:endParaRPr lang="en-US" sz="2600" dirty="0"/>
+          </a:p>
+        </p:txBody>
+      </p:sp>
+      <p:sp>
+        <p:nvSpPr>
+          <p:cNvPr id="5" name="Shape 2"/>
+          <p:cNvSpPr/>
+          <p:nvPr/>
+        </p:nvSpPr>
+        <p:spPr>
+          <a:xfrm>
+            <a:off x="457200" y="1325880"/>
+            <a:ext cx="8229600" cy="1207008"/>
+          </a:xfrm>
+          <a:prstGeom prst="roundRect">
+            <a:avLst>
+              <a:gd name="adj" fmla="val 6061"/>
+            </a:avLst>
+          </a:prstGeom>
+          <a:solidFill>
+            <a:srgbClr val="F1F5F9"/>
+          </a:solidFill>
+          <a:ln/>
+          <a:effectLst>
+            <a:outerShdw sx="100000" sy="100000" kx="0" ky="0" algn="bl" rotWithShape="0" blurRad="76200" dist="25400" dir="5400000">
+              <a:srgbClr val="000000">
+                <a:alpha val="12000"/>
+              </a:srgbClr>
+            </a:outerShdw>
+          </a:effectLst>
+        </p:spPr>
+      </p:sp>
+      <p:sp>
+        <p:nvSpPr>
+          <p:cNvPr id="6" name="Text 3"/>
+          <p:cNvSpPr/>
+          <p:nvPr/>
+        </p:nvSpPr>
+        <p:spPr>
+          <a:xfrm>
+            <a:off x="731520" y="1435608"/>
+            <a:ext cx="7680960" cy="987552"/>
+          </a:xfrm>
+          <a:prstGeom prst="rect">
+            <a:avLst/>
+          </a:prstGeom>
+          <a:noFill/>
+          <a:ln/>
+        </p:spPr>
+        <p:txBody>
+          <a:bodyPr wrap="square" lIns="0" tIns="0" rIns="0" bIns="0" rtlCol="0" anchor="t">
+            <a:normAutofit/>
+          </a:bodyPr>
+          <a:lstStyle/>
+          <a:p>
+            <a:pPr marL="342900" indent="-342900">
+              <a:spcAft>
+                <a:spcPts val="600"/>
+              </a:spcAft>
+              <a:buSzPct val="100000"/>
+              <a:buChar char="•"/>
+            </a:pPr>
+            <a:r>
+              <a:rPr lang="en-US" sz="1400" dirty="0">
+                <a:solidFill>
+                  <a:srgbClr val="1F2937"/>
+                </a:solidFill>
+                <a:latin typeface="Calibri" pitchFamily="34" charset="0"/>
+                <a:ea typeface="Calibri" pitchFamily="34" charset="-122"/>
+                <a:cs typeface="Calibri" pitchFamily="34" charset="-120"/>
+              </a:rPr>
+              <a:t>Encoding ≠ encryption; hashing isn't reversible</a:t>
+            </a:r>
+            <a:endParaRPr lang="en-US" sz="1400" dirty="0"/>
+          </a:p>
+          <a:p>
+            <a:pPr marL="342900" indent="-342900">
+              <a:spcAft>
+                <a:spcPts val="600"/>
+              </a:spcAft>
+              <a:buSzPct val="100000"/>
+              <a:buChar char="•"/>
+            </a:pPr>
+            <a:r>
+              <a:rPr lang="en-US" sz="1400" dirty="0">
+                <a:solidFill>
+                  <a:srgbClr val="1F2937"/>
+                </a:solidFill>
+                <a:latin typeface="Calibri" pitchFamily="34" charset="0"/>
+                <a:ea typeface="Calibri" pitchFamily="34" charset="-122"/>
+                <a:cs typeface="Calibri" pitchFamily="34" charset="-120"/>
+              </a:rPr>
+              <a:t>Use vetted KDFs + authenticated encryption — never roll your own</a:t>
+            </a:r>
+            <a:endParaRPr lang="en-US" sz="1400" dirty="0"/>
+          </a:p>
+          <a:p>
+            <a:pPr marL="342900" indent="-342900">
+              <a:spcAft>
+                <a:spcPts val="600"/>
+              </a:spcAft>
+              <a:buSzPct val="100000"/>
+              <a:buChar char="•"/>
+            </a:pPr>
+            <a:r>
+              <a:rPr lang="en-US" sz="1400" dirty="0">
+                <a:solidFill>
+                  <a:srgbClr val="1F2937"/>
+                </a:solidFill>
+                <a:latin typeface="Calibri" pitchFamily="34" charset="0"/>
+                <a:ea typeface="Calibri" pitchFamily="34" charset="-122"/>
+                <a:cs typeface="Calibri" pitchFamily="34" charset="-120"/>
+              </a:rPr>
+              <a:t>Randomness &amp; key handling matter as much as the algorithm</a:t>
+            </a:r>
+            <a:endParaRPr lang="en-US" sz="1400" dirty="0"/>
+          </a:p>
+        </p:txBody>
+      </p:sp>
+      <p:sp>
+        <p:nvSpPr>
+          <p:cNvPr id="7" name="Text 4"/>
+          <p:cNvSpPr/>
+          <p:nvPr/>
+        </p:nvSpPr>
+        <p:spPr>
+          <a:xfrm>
+            <a:off x="457200" y="4800600"/>
+            <a:ext cx="6949440" cy="274320"/>
+          </a:xfrm>
+          <a:prstGeom prst="rect">
+            <a:avLst/>
+          </a:prstGeom>
+          <a:noFill/>
+          <a:ln/>
+        </p:spPr>
+        <p:txBody>
+          <a:bodyPr wrap="square" lIns="0" tIns="0" rIns="0" bIns="0" rtlCol="0" anchor="ctr"/>
+          <a:lstStyle/>
+          <a:p>
+            <a:pPr indent="0" marL="0">
+              <a:buNone/>
+            </a:pPr>
+            <a:r>
+              <a:rPr lang="en-US" sz="900" dirty="0">
+                <a:solidFill>
+                  <a:srgbClr val="64748B"/>
+                </a:solidFill>
+                <a:latin typeface="Calibri" pitchFamily="34" charset="0"/>
+                <a:ea typeface="Calibri" pitchFamily="34" charset="-122"/>
+                <a:cs typeface="Calibri" pitchFamily="34" charset="-120"/>
+              </a:rPr>
+              <a:t>Software Security · Week 3</a:t>
+            </a:r>
+            <a:endParaRPr lang="en-US" sz="900" dirty="0"/>
+          </a:p>
+        </p:txBody>
+      </p:sp>
+      <p:pic>
+        <p:nvPicPr>
+          <p:cNvPr id="8" name="Image 1" descr="/Users/pop7/Library/CloudStorage/OneDrive-MonsterConnectCo.,Ltd/Lecture/KOSEN69 - software-security/slides/pptx/assets/logo-small.png">    </p:cNvPr>
+          <p:cNvPicPr>
+            <a:picLocks noChangeAspect="1"/>
+          </p:cNvPicPr>
+          <p:nvPr/>
+        </p:nvPicPr>
+        <p:blipFill>
+          <a:blip r:embed="rId2"/>
           <a:stretch>
             <a:fillRect/>
           </a:stretch>
@@ -5065,6 +6195,140 @@
 </p:sld>
 </file>
 
+<file path=ppt/slides/slide20.xml><?xml version="1.0" encoding="utf-8"?>
+<p:sld xmlns:a="http://schemas.openxmlformats.org/drawingml/2006/main" xmlns:r="http://schemas.openxmlformats.org/officeDocument/2006/relationships" xmlns:p="http://schemas.openxmlformats.org/presentationml/2006/main">
+  <p:cSld name="Slide 20">
+    <p:bg>
+      <p:bgPr>
+        <a:solidFill>
+          <a:srgbClr val="FFFFFF"/>
+        </a:solidFill>
+      </p:bgPr>
+    </p:bg>
+    <p:spTree>
+      <p:nvGrpSpPr>
+        <p:cNvPr id="1" name=""/>
+        <p:cNvGrpSpPr/>
+        <p:nvPr/>
+      </p:nvGrpSpPr>
+      <p:grpSpPr>
+        <a:xfrm>
+          <a:off x="0" y="0"/>
+          <a:ext cx="0" cy="0"/>
+          <a:chOff x="0" y="0"/>
+          <a:chExt cx="0" cy="0"/>
+        </a:xfrm>
+      </p:grpSpPr>
+      <p:sp>
+        <p:nvSpPr>
+          <p:cNvPr id="2" name="Text 0"/>
+          <p:cNvSpPr/>
+          <p:nvPr/>
+        </p:nvSpPr>
+        <p:spPr>
+          <a:xfrm>
+            <a:off x="640080" y="1737360"/>
+            <a:ext cx="7863840" cy="1097280"/>
+          </a:xfrm>
+          <a:prstGeom prst="rect">
+            <a:avLst/>
+          </a:prstGeom>
+          <a:noFill/>
+          <a:ln/>
+        </p:spPr>
+        <p:txBody>
+          <a:bodyPr wrap="square" lIns="0" tIns="0" rIns="0" bIns="0" rtlCol="0" anchor="ctr"/>
+          <a:lstStyle/>
+          <a:p>
+            <a:pPr indent="0" marL="0">
+              <a:buNone/>
+            </a:pPr>
+            <a:r>
+              <a:rPr lang="en-US" sz="4600" b="1" dirty="0">
+                <a:solidFill>
+                  <a:srgbClr val="1F2937"/>
+                </a:solidFill>
+                <a:latin typeface="Arial" pitchFamily="34" charset="0"/>
+                <a:ea typeface="Arial" pitchFamily="34" charset="-122"/>
+                <a:cs typeface="Arial" pitchFamily="34" charset="-120"/>
+              </a:rPr>
+              <a:t>Questions?</a:t>
+            </a:r>
+            <a:endParaRPr lang="en-US" sz="4600" dirty="0"/>
+          </a:p>
+        </p:txBody>
+      </p:sp>
+      <p:sp>
+        <p:nvSpPr>
+          <p:cNvPr id="3" name="Text 1"/>
+          <p:cNvSpPr/>
+          <p:nvPr/>
+        </p:nvSpPr>
+        <p:spPr>
+          <a:xfrm>
+            <a:off x="658368" y="2834640"/>
+            <a:ext cx="7863840" cy="731520"/>
+          </a:xfrm>
+          <a:prstGeom prst="rect">
+            <a:avLst/>
+          </a:prstGeom>
+          <a:noFill/>
+          <a:ln/>
+        </p:spPr>
+        <p:txBody>
+          <a:bodyPr wrap="square" lIns="0" tIns="0" rIns="0" bIns="0" rtlCol="0" anchor="ctr"/>
+          <a:lstStyle/>
+          <a:p>
+            <a:pPr indent="0" marL="0">
+              <a:buNone/>
+            </a:pPr>
+            <a:r>
+              <a:rPr lang="en-US" sz="1800" dirty="0">
+                <a:solidFill>
+                  <a:srgbClr val="E35205"/>
+                </a:solidFill>
+                <a:latin typeface="Calibri" pitchFamily="34" charset="0"/>
+                <a:ea typeface="Calibri" pitchFamily="34" charset="-122"/>
+                <a:cs typeface="Calibri" pitchFamily="34" charset="-120"/>
+              </a:rPr>
+              <a:t>Next week: Injection &amp; input handling</a:t>
+            </a:r>
+            <a:endParaRPr lang="en-US" sz="1800" dirty="0"/>
+          </a:p>
+        </p:txBody>
+      </p:sp>
+      <p:pic>
+        <p:nvPicPr>
+          <p:cNvPr id="4" name="Image 0" descr="/Users/pop7/Library/CloudStorage/OneDrive-MonsterConnectCo.,Ltd/Lecture/KOSEN69 - software-security/slides/pptx/assets/logo-small.png">    </p:cNvPr>
+          <p:cNvPicPr>
+            <a:picLocks noChangeAspect="1"/>
+          </p:cNvPicPr>
+          <p:nvPr/>
+        </p:nvPicPr>
+        <p:blipFill>
+          <a:blip r:embed="rId1"/>
+          <a:stretch>
+            <a:fillRect/>
+          </a:stretch>
+        </p:blipFill>
+        <p:spPr>
+          <a:xfrm>
+            <a:off x="7882128" y="4700016"/>
+            <a:ext cx="768096" cy="356616"/>
+          </a:xfrm>
+          <a:prstGeom prst="rect">
+            <a:avLst/>
+          </a:prstGeom>
+        </p:spPr>
+      </p:pic>
+    </p:spTree>
+  </p:cSld>
+  <p:clrMapOvr>
+    <a:masterClrMapping/>
+  </p:clrMapOvr>
+</p:sld>
+</file>
+
 <file path=ppt/slides/slide3.xml><?xml version="1.0" encoding="utf-8"?>
 <p:sld xmlns:a="http://schemas.openxmlformats.org/drawingml/2006/main" xmlns:r="http://schemas.openxmlformats.org/officeDocument/2006/relationships" xmlns:p="http://schemas.openxmlformats.org/presentationml/2006/main">
   <p:cSld name="Slide 3">
@@ -6804,7 +8068,7 @@
                 <a:ea typeface="Arial" pitchFamily="34" charset="-122"/>
                 <a:cs typeface="Arial" pitchFamily="34" charset="-120"/>
               </a:rPr>
-              <a:t>Capture the Hash — how cracking works</a:t>
+              <a:t>ECB in one picture</a:t>
             </a:r>
             <a:endParaRPr lang="en-US" sz="2600" dirty="0"/>
           </a:p>
@@ -6812,41 +8076,14 @@
       </p:sp>
       <p:sp>
         <p:nvSpPr>
-          <p:cNvPr id="5" name="Shape 2"/>
-          <p:cNvSpPr/>
-          <p:nvPr/>
-        </p:nvSpPr>
-        <p:spPr>
-          <a:xfrm>
-            <a:off x="457200" y="1325880"/>
-            <a:ext cx="8229600" cy="713232"/>
-          </a:xfrm>
-          <a:prstGeom prst="roundRect">
-            <a:avLst>
-              <a:gd name="adj" fmla="val 7692"/>
-            </a:avLst>
-          </a:prstGeom>
-          <a:solidFill>
-            <a:srgbClr val="0A1020"/>
-          </a:solidFill>
-          <a:ln w="12700">
-            <a:solidFill>
-              <a:srgbClr val="E8EDF3"/>
-            </a:solidFill>
-            <a:prstDash val="solid"/>
-          </a:ln>
-        </p:spPr>
-      </p:sp>
-      <p:sp>
-        <p:nvSpPr>
-          <p:cNvPr id="6" name="Text 3"/>
-          <p:cNvSpPr/>
-          <p:nvPr/>
-        </p:nvSpPr>
-        <p:spPr>
-          <a:xfrm>
-            <a:off x="640080" y="1399032"/>
-            <a:ext cx="7863840" cy="566928"/>
+          <p:cNvPr id="5" name="Text 2"/>
+          <p:cNvSpPr/>
+          <p:nvPr/>
+        </p:nvSpPr>
+        <p:spPr>
+          <a:xfrm>
+            <a:off x="548640" y="1325880"/>
+            <a:ext cx="8046720" cy="1920240"/>
           </a:xfrm>
           <a:prstGeom prst="rect">
             <a:avLst/>
@@ -6864,97 +8101,6 @@
               <a:buNone/>
             </a:pPr>
             <a:r>
-              <a:rPr lang="en-US" sz="1150" dirty="0">
-                <a:solidFill>
-                  <a:srgbClr val="9FE7D6"/>
-                </a:solidFill>
-                <a:latin typeface="Courier New" pitchFamily="34" charset="0"/>
-                <a:ea typeface="Courier New" pitchFamily="34" charset="-122"/>
-                <a:cs typeface="Courier New" pitchFamily="34" charset="-120"/>
-              </a:rPr>
-              <a:t># strip comments, then crack unsalted MD5 with a wordlist</a:t>
-            </a:r>
-            <a:endParaRPr lang="en-US" sz="1150" dirty="0"/>
-          </a:p>
-          <a:p>
-            <a:pPr indent="0" marL="0">
-              <a:buNone/>
-            </a:pPr>
-            <a:r>
-              <a:rPr lang="en-US" sz="1150" dirty="0">
-                <a:solidFill>
-                  <a:srgbClr val="9FE7D6"/>
-                </a:solidFill>
-                <a:latin typeface="Courier New" pitchFamily="34" charset="0"/>
-                <a:ea typeface="Courier New" pitchFamily="34" charset="-122"/>
-                <a:cs typeface="Courier New" pitchFamily="34" charset="-120"/>
-              </a:rPr>
-              <a:t>hashcat -m 0 hashes.txt rockyou.txt</a:t>
-            </a:r>
-            <a:endParaRPr lang="en-US" sz="1150" dirty="0"/>
-          </a:p>
-        </p:txBody>
-      </p:sp>
-      <p:sp>
-        <p:nvSpPr>
-          <p:cNvPr id="7" name="Shape 4"/>
-          <p:cNvSpPr/>
-          <p:nvPr/>
-        </p:nvSpPr>
-        <p:spPr>
-          <a:xfrm>
-            <a:off x="457200" y="2203704"/>
-            <a:ext cx="8229600" cy="896112"/>
-          </a:xfrm>
-          <a:prstGeom prst="roundRect">
-            <a:avLst>
-              <a:gd name="adj" fmla="val 8163"/>
-            </a:avLst>
-          </a:prstGeom>
-          <a:solidFill>
-            <a:srgbClr val="F1F5F9"/>
-          </a:solidFill>
-          <a:ln/>
-          <a:effectLst>
-            <a:outerShdw sx="100000" sy="100000" kx="0" ky="0" algn="bl" rotWithShape="0" blurRad="76200" dist="25400" dir="5400000">
-              <a:srgbClr val="000000">
-                <a:alpha val="12000"/>
-              </a:srgbClr>
-            </a:outerShdw>
-          </a:effectLst>
-        </p:spPr>
-      </p:sp>
-      <p:sp>
-        <p:nvSpPr>
-          <p:cNvPr id="8" name="Text 5"/>
-          <p:cNvSpPr/>
-          <p:nvPr/>
-        </p:nvSpPr>
-        <p:spPr>
-          <a:xfrm>
-            <a:off x="731520" y="2313432"/>
-            <a:ext cx="7680960" cy="676656"/>
-          </a:xfrm>
-          <a:prstGeom prst="rect">
-            <a:avLst/>
-          </a:prstGeom>
-          <a:noFill/>
-          <a:ln/>
-        </p:spPr>
-        <p:txBody>
-          <a:bodyPr wrap="square" lIns="0" tIns="0" rIns="0" bIns="0" rtlCol="0" anchor="t">
-            <a:normAutofit/>
-          </a:bodyPr>
-          <a:lstStyle/>
-          <a:p>
-            <a:pPr marL="342900" indent="-342900">
-              <a:spcAft>
-                <a:spcPts val="600"/>
-              </a:spcAft>
-              <a:buSzPct val="100000"/>
-              <a:buChar char="•"/>
-            </a:pPr>
-            <a:r>
               <a:rPr lang="en-US" sz="1400" dirty="0">
                 <a:solidFill>
                   <a:srgbClr val="1F2937"/>
@@ -6963,66 +8109,45 @@
                 <a:ea typeface="Calibri" pitchFamily="34" charset="-122"/>
                 <a:cs typeface="Calibri" pitchFamily="34" charset="-120"/>
               </a:rPr>
-              <a:t>Unsalted fast hash → attacker hashes wordlist once, matches millions</a:t>
+              <a:t>See diagram: Two identical 16-byte plaintext blocks encrypted with ECB become two identical ciphertext blocks, so the repetition leaks (the ECB-penguin effect); the same input re-encrypts to the same bytes because there is no nonce. AES-GCM with a random nonce and auth tag produces different, random-looking blocks and detects tampering. Choosing AES is not the fix — AES-ECB leaks and AES-GCM under a hardcoded key is still CWE-798. (web only)</a:t>
             </a:r>
             <a:endParaRPr lang="en-US" sz="1400" dirty="0"/>
           </a:p>
-          <a:p>
-            <a:pPr marL="342900" indent="-342900">
-              <a:spcAft>
-                <a:spcPts val="600"/>
-              </a:spcAft>
-              <a:buSzPct val="100000"/>
-              <a:buChar char="•"/>
-            </a:pPr>
-            <a:r>
-              <a:rPr lang="en-US" sz="1400" dirty="0">
-                <a:solidFill>
-                  <a:srgbClr val="1F2937"/>
+        </p:txBody>
+      </p:sp>
+      <p:sp>
+        <p:nvSpPr>
+          <p:cNvPr id="6" name="Text 3"/>
+          <p:cNvSpPr/>
+          <p:nvPr/>
+        </p:nvSpPr>
+        <p:spPr>
+          <a:xfrm>
+            <a:off x="457200" y="4800600"/>
+            <a:ext cx="6949440" cy="274320"/>
+          </a:xfrm>
+          <a:prstGeom prst="rect">
+            <a:avLst/>
+          </a:prstGeom>
+          <a:noFill/>
+          <a:ln/>
+        </p:spPr>
+        <p:txBody>
+          <a:bodyPr wrap="square" lIns="0" tIns="0" rIns="0" bIns="0" rtlCol="0" anchor="ctr"/>
+          <a:lstStyle/>
+          <a:p>
+            <a:pPr indent="0" marL="0">
+              <a:buNone/>
+            </a:pPr>
+            <a:r>
+              <a:rPr lang="en-US" sz="900" dirty="0">
+                <a:solidFill>
+                  <a:srgbClr val="64748B"/>
                 </a:solidFill>
                 <a:latin typeface="Calibri" pitchFamily="34" charset="0"/>
                 <a:ea typeface="Calibri" pitchFamily="34" charset="-122"/>
                 <a:cs typeface="Calibri" pitchFamily="34" charset="-120"/>
               </a:rPr>
-              <a:t>Salt would force per-guess work; a slow KDF makes it infeasible</a:t>
-            </a:r>
-            <a:endParaRPr lang="en-US" sz="1400" dirty="0"/>
-          </a:p>
-        </p:txBody>
-      </p:sp>
-      <p:sp>
-        <p:nvSpPr>
-          <p:cNvPr id="9" name="Text 6"/>
-          <p:cNvSpPr/>
-          <p:nvPr/>
-        </p:nvSpPr>
-        <p:spPr>
-          <a:xfrm>
-            <a:off x="457200" y="4800600"/>
-            <a:ext cx="6949440" cy="274320"/>
-          </a:xfrm>
-          <a:prstGeom prst="rect">
-            <a:avLst/>
-          </a:prstGeom>
-          <a:noFill/>
-          <a:ln/>
-        </p:spPr>
-        <p:txBody>
-          <a:bodyPr wrap="square" lIns="0" tIns="0" rIns="0" bIns="0" rtlCol="0" anchor="ctr"/>
-          <a:lstStyle/>
-          <a:p>
-            <a:pPr indent="0" marL="0">
-              <a:buNone/>
-            </a:pPr>
-            <a:r>
-              <a:rPr lang="en-US" sz="900" dirty="0">
-                <a:solidFill>
-                  <a:srgbClr val="64748B"/>
-                </a:solidFill>
-                <a:latin typeface="Calibri" pitchFamily="34" charset="0"/>
-                <a:ea typeface="Calibri" pitchFamily="34" charset="-122"/>
-                <a:cs typeface="Calibri" pitchFamily="34" charset="-120"/>
-              </a:rPr>
               <a:t>Software Security · Week 3</a:t>
             </a:r>
             <a:endParaRPr lang="en-US" sz="900" dirty="0"/>
@@ -7031,7 +8156,7 @@
       </p:sp>
       <p:pic>
         <p:nvPicPr>
-          <p:cNvPr id="10" name="Image 1" descr="/Users/pop7/Library/CloudStorage/OneDrive-MonsterConnectCo.,Ltd/Lecture/KOSEN69 - software-security/slides/pptx/assets/logo-small.png">    </p:cNvPr>
+          <p:cNvPr id="7" name="Image 1" descr="/Users/pop7/Library/CloudStorage/OneDrive-MonsterConnectCo.,Ltd/Lecture/KOSEN69 - software-security/slides/pptx/assets/logo-small.png">    </p:cNvPr>
           <p:cNvPicPr>
             <a:picLocks noChangeAspect="1"/>
           </p:cNvPicPr>
@@ -7169,7 +8294,7 @@
                 <a:ea typeface="Arial" pitchFamily="34" charset="-122"/>
                 <a:cs typeface="Arial" pitchFamily="34" charset="-120"/>
               </a:rPr>
-              <a:t>Common crypto failures (A04:2025)</a:t>
+              <a:t>Capture the Hash — how cracking works</a:t>
             </a:r>
             <a:endParaRPr lang="en-US" sz="2600" dirty="0"/>
           </a:p>
@@ -7184,11 +8309,96 @@
         <p:spPr>
           <a:xfrm>
             <a:off x="457200" y="1325880"/>
-            <a:ext cx="8229600" cy="1517904"/>
+            <a:ext cx="8229600" cy="713232"/>
           </a:xfrm>
           <a:prstGeom prst="roundRect">
             <a:avLst>
-              <a:gd name="adj" fmla="val 4819"/>
+              <a:gd name="adj" fmla="val 7692"/>
+            </a:avLst>
+          </a:prstGeom>
+          <a:solidFill>
+            <a:srgbClr val="0A1020"/>
+          </a:solidFill>
+          <a:ln w="12700">
+            <a:solidFill>
+              <a:srgbClr val="E8EDF3"/>
+            </a:solidFill>
+            <a:prstDash val="solid"/>
+          </a:ln>
+        </p:spPr>
+      </p:sp>
+      <p:sp>
+        <p:nvSpPr>
+          <p:cNvPr id="6" name="Text 3"/>
+          <p:cNvSpPr/>
+          <p:nvPr/>
+        </p:nvSpPr>
+        <p:spPr>
+          <a:xfrm>
+            <a:off x="640080" y="1399032"/>
+            <a:ext cx="7863840" cy="566928"/>
+          </a:xfrm>
+          <a:prstGeom prst="rect">
+            <a:avLst/>
+          </a:prstGeom>
+          <a:noFill/>
+          <a:ln/>
+        </p:spPr>
+        <p:txBody>
+          <a:bodyPr wrap="square" lIns="0" tIns="0" rIns="0" bIns="0" rtlCol="0" anchor="t">
+            <a:normAutofit/>
+          </a:bodyPr>
+          <a:lstStyle/>
+          <a:p>
+            <a:pPr indent="0" marL="0">
+              <a:buNone/>
+            </a:pPr>
+            <a:r>
+              <a:rPr lang="en-US" sz="1150" dirty="0">
+                <a:solidFill>
+                  <a:srgbClr val="9FE7D6"/>
+                </a:solidFill>
+                <a:latin typeface="Courier New" pitchFamily="34" charset="0"/>
+                <a:ea typeface="Courier New" pitchFamily="34" charset="-122"/>
+                <a:cs typeface="Courier New" pitchFamily="34" charset="-120"/>
+              </a:rPr>
+              <a:t># strip comments, then crack unsalted MD5 with a wordlist</a:t>
+            </a:r>
+            <a:endParaRPr lang="en-US" sz="1150" dirty="0"/>
+          </a:p>
+          <a:p>
+            <a:pPr indent="0" marL="0">
+              <a:buNone/>
+            </a:pPr>
+            <a:r>
+              <a:rPr lang="en-US" sz="1150" dirty="0">
+                <a:solidFill>
+                  <a:srgbClr val="9FE7D6"/>
+                </a:solidFill>
+                <a:latin typeface="Courier New" pitchFamily="34" charset="0"/>
+                <a:ea typeface="Courier New" pitchFamily="34" charset="-122"/>
+                <a:cs typeface="Courier New" pitchFamily="34" charset="-120"/>
+              </a:rPr>
+              <a:t>hashcat -m 0 hashes.txt rockyou.txt</a:t>
+            </a:r>
+            <a:endParaRPr lang="en-US" sz="1150" dirty="0"/>
+          </a:p>
+        </p:txBody>
+      </p:sp>
+      <p:sp>
+        <p:nvSpPr>
+          <p:cNvPr id="7" name="Shape 4"/>
+          <p:cNvSpPr/>
+          <p:nvPr/>
+        </p:nvSpPr>
+        <p:spPr>
+          <a:xfrm>
+            <a:off x="457200" y="2203704"/>
+            <a:ext cx="8229600" cy="896112"/>
+          </a:xfrm>
+          <a:prstGeom prst="roundRect">
+            <a:avLst>
+              <a:gd name="adj" fmla="val 8163"/>
             </a:avLst>
           </a:prstGeom>
           <a:solidFill>
@@ -7206,14 +8416,14 @@
       </p:sp>
       <p:sp>
         <p:nvSpPr>
-          <p:cNvPr id="6" name="Text 3"/>
-          <p:cNvSpPr/>
-          <p:nvPr/>
-        </p:nvSpPr>
-        <p:spPr>
-          <a:xfrm>
-            <a:off x="731520" y="1435608"/>
-            <a:ext cx="7680960" cy="1298448"/>
+          <p:cNvPr id="8" name="Text 5"/>
+          <p:cNvSpPr/>
+          <p:nvPr/>
+        </p:nvSpPr>
+        <p:spPr>
+          <a:xfrm>
+            <a:off x="731520" y="2313432"/>
+            <a:ext cx="7680960" cy="676656"/>
           </a:xfrm>
           <a:prstGeom prst="rect">
             <a:avLst/>
@@ -7243,7 +8453,7 @@
                 <a:ea typeface="Calibri" pitchFamily="34" charset="-122"/>
                 <a:cs typeface="Calibri" pitchFamily="34" charset="-120"/>
               </a:rPr>
-              <a:t>ECB mode → block patterns leak</a:t>
+              <a:t>Unsalted fast hash → attacker hashes wordlist once, matches millions</a:t>
             </a:r>
             <a:endParaRPr lang="en-US" sz="1400" dirty="0"/>
           </a:p>
@@ -7264,87 +8474,45 @@
                 <a:ea typeface="Calibri" pitchFamily="34" charset="-122"/>
                 <a:cs typeface="Calibri" pitchFamily="34" charset="-120"/>
               </a:rPr>
-              <a:t>Hardcoded keys / keys in source (CWE-798)</a:t>
+              <a:t>Salt would force per-guess work; a slow KDF makes it infeasible</a:t>
             </a:r>
             <a:endParaRPr lang="en-US" sz="1400" dirty="0"/>
           </a:p>
-          <a:p>
-            <a:pPr marL="342900" indent="-342900">
-              <a:spcAft>
-                <a:spcPts val="600"/>
-              </a:spcAft>
-              <a:buSzPct val="100000"/>
-              <a:buChar char="•"/>
-            </a:pPr>
-            <a:r>
-              <a:rPr lang="en-US" sz="1400" dirty="0">
-                <a:solidFill>
-                  <a:srgbClr val="1F2937"/>
+        </p:txBody>
+      </p:sp>
+      <p:sp>
+        <p:nvSpPr>
+          <p:cNvPr id="9" name="Text 6"/>
+          <p:cNvSpPr/>
+          <p:nvPr/>
+        </p:nvSpPr>
+        <p:spPr>
+          <a:xfrm>
+            <a:off x="457200" y="4800600"/>
+            <a:ext cx="6949440" cy="274320"/>
+          </a:xfrm>
+          <a:prstGeom prst="rect">
+            <a:avLst/>
+          </a:prstGeom>
+          <a:noFill/>
+          <a:ln/>
+        </p:spPr>
+        <p:txBody>
+          <a:bodyPr wrap="square" lIns="0" tIns="0" rIns="0" bIns="0" rtlCol="0" anchor="ctr"/>
+          <a:lstStyle/>
+          <a:p>
+            <a:pPr indent="0" marL="0">
+              <a:buNone/>
+            </a:pPr>
+            <a:r>
+              <a:rPr lang="en-US" sz="900" dirty="0">
+                <a:solidFill>
+                  <a:srgbClr val="64748B"/>
                 </a:solidFill>
                 <a:latin typeface="Calibri" pitchFamily="34" charset="0"/>
                 <a:ea typeface="Calibri" pitchFamily="34" charset="-122"/>
                 <a:cs typeface="Calibri" pitchFamily="34" charset="-120"/>
               </a:rPr>
-              <a:t>Weak RNG (random instead of secrets/CSPRNG) (CWE-330)</a:t>
-            </a:r>
-            <a:endParaRPr lang="en-US" sz="1400" dirty="0"/>
-          </a:p>
-          <a:p>
-            <a:pPr marL="342900" indent="-342900">
-              <a:spcAft>
-                <a:spcPts val="600"/>
-              </a:spcAft>
-              <a:buSzPct val="100000"/>
-              <a:buChar char="•"/>
-            </a:pPr>
-            <a:r>
-              <a:rPr lang="en-US" sz="1400" dirty="0">
-                <a:solidFill>
-                  <a:srgbClr val="1F2937"/>
-                </a:solidFill>
-                <a:latin typeface="Calibri" pitchFamily="34" charset="0"/>
-                <a:ea typeface="Calibri" pitchFamily="34" charset="-122"/>
-                <a:cs typeface="Calibri" pitchFamily="34" charset="-120"/>
-              </a:rPr>
-              <a:t>MD5 / SHA-1 for security; unauthenticated encryption (no integrity)</a:t>
-            </a:r>
-            <a:endParaRPr lang="en-US" sz="1400" dirty="0"/>
-          </a:p>
-        </p:txBody>
-      </p:sp>
-      <p:sp>
-        <p:nvSpPr>
-          <p:cNvPr id="7" name="Text 4"/>
-          <p:cNvSpPr/>
-          <p:nvPr/>
-        </p:nvSpPr>
-        <p:spPr>
-          <a:xfrm>
-            <a:off x="457200" y="4800600"/>
-            <a:ext cx="6949440" cy="274320"/>
-          </a:xfrm>
-          <a:prstGeom prst="rect">
-            <a:avLst/>
-          </a:prstGeom>
-          <a:noFill/>
-          <a:ln/>
-        </p:spPr>
-        <p:txBody>
-          <a:bodyPr wrap="square" lIns="0" tIns="0" rIns="0" bIns="0" rtlCol="0" anchor="ctr"/>
-          <a:lstStyle/>
-          <a:p>
-            <a:pPr indent="0" marL="0">
-              <a:buNone/>
-            </a:pPr>
-            <a:r>
-              <a:rPr lang="en-US" sz="900" dirty="0">
-                <a:solidFill>
-                  <a:srgbClr val="64748B"/>
-                </a:solidFill>
-                <a:latin typeface="Calibri" pitchFamily="34" charset="0"/>
-                <a:ea typeface="Calibri" pitchFamily="34" charset="-122"/>
-                <a:cs typeface="Calibri" pitchFamily="34" charset="-120"/>
-              </a:rPr>
               <a:t>Software Security · Week 3</a:t>
             </a:r>
             <a:endParaRPr lang="en-US" sz="900" dirty="0"/>
@@ -7353,7 +8521,7 @@
       </p:sp>
       <p:pic>
         <p:nvPicPr>
-          <p:cNvPr id="8" name="Image 1" descr="/Users/pop7/Library/CloudStorage/OneDrive-MonsterConnectCo.,Ltd/Lecture/KOSEN69 - software-security/slides/pptx/assets/logo-small.png">    </p:cNvPr>
+          <p:cNvPr id="10" name="Image 1" descr="/Users/pop7/Library/CloudStorage/OneDrive-MonsterConnectCo.,Ltd/Lecture/KOSEN69 - software-security/slides/pptx/assets/logo-small.png">    </p:cNvPr>
           <p:cNvPicPr>
             <a:picLocks noChangeAspect="1"/>
           </p:cNvPicPr>
